--- a/templates/posts/october/2026-10-05-mon-ig-teachers-day-banner-cards-alt.pptx
+++ b/templates/posts/october/2026-10-05-mon-ig-teachers-day-banner-cards-alt.pptx
@@ -3802,7 +3802,7 @@
       <p:grpSpPr/>
       <p:pic>
         <p:nvPicPr>
-          <p:cNvPr id="2" name="Picture 1" descr="4355398489629813437.jpg"/>
+          <p:cNvPr id="2" name="Picture 1" descr="7699113808067708069.jpg"/>
           <p:cNvPicPr>
             <a:picLocks noChangeAspect="1"/>
           </p:cNvPicPr>
@@ -5030,7 +5030,7 @@
       <p:grpSpPr/>
       <p:pic>
         <p:nvPicPr>
-          <p:cNvPr id="2" name="Picture 1" descr="2028138996116544120.jpg"/>
+          <p:cNvPr id="2" name="Picture 1" descr="6892541509162598841.jpg"/>
           <p:cNvPicPr>
             <a:picLocks noChangeAspect="1"/>
           </p:cNvPicPr>
@@ -6258,7 +6258,7 @@
       <p:grpSpPr/>
       <p:pic>
         <p:nvPicPr>
-          <p:cNvPr id="2" name="Picture 1" descr="6845543366928267165.jpg"/>
+          <p:cNvPr id="2" name="Picture 1" descr="7500802371811747991.jpg"/>
           <p:cNvPicPr>
             <a:picLocks noChangeAspect="1"/>
           </p:cNvPicPr>
@@ -7486,7 +7486,7 @@
       <p:grpSpPr/>
       <p:pic>
         <p:nvPicPr>
-          <p:cNvPr id="2" name="Picture 1" descr="3158279430664758111.jpg"/>
+          <p:cNvPr id="2" name="Picture 1" descr="7616125880658272022.jpg"/>
           <p:cNvPicPr>
             <a:picLocks noChangeAspect="1"/>
           </p:cNvPicPr>

--- a/templates/posts/october/2026-10-05-mon-ig-teachers-day-banner-cards-alt.pptx
+++ b/templates/posts/october/2026-10-05-mon-ig-teachers-day-banner-cards-alt.pptx
@@ -3802,7 +3802,7 @@
       <p:grpSpPr/>
       <p:pic>
         <p:nvPicPr>
-          <p:cNvPr id="2" name="Picture 1" descr="7699113808067708069.jpg"/>
+          <p:cNvPr id="2" name="Picture 1" descr="4276041248470525378.jpg"/>
           <p:cNvPicPr>
             <a:picLocks noChangeAspect="1"/>
           </p:cNvPicPr>
@@ -3817,7 +3817,7 @@
         <p:spPr>
           <a:xfrm>
             <a:off x="0" y="0"/>
-            <a:ext cx="10287000" cy="12858750"/>
+            <a:ext cx="10287000" cy="9620250"/>
           </a:xfrm>
           <a:prstGeom prst="rect">
             <a:avLst/>
@@ -4497,11 +4497,11 @@
         <p:spPr>
           <a:xfrm>
             <a:off x="-571500" y="-571500"/>
-            <a:ext cx="5905500" cy="3048000"/>
+            <a:ext cx="4381500" cy="2476500"/>
           </a:xfrm>
           <a:prstGeom prst="roundRect">
             <a:avLst>
-              <a:gd name="adj" fmla="val 12500"/>
+              <a:gd name="adj" fmla="val 15384"/>
             </a:avLst>
           </a:prstGeom>
           <a:solidFill>
@@ -4544,8 +4544,8 @@
         </p:nvSpPr>
         <p:spPr>
           <a:xfrm>
-            <a:off x="666750" y="571500"/>
-            <a:ext cx="1238250" cy="1238250"/>
+            <a:off x="571500" y="476250"/>
+            <a:ext cx="952500" cy="952500"/>
           </a:xfrm>
           <a:prstGeom prst="ellipse">
             <a:avLst/>
@@ -4588,8 +4588,8 @@
         </p:nvSpPr>
         <p:spPr>
           <a:xfrm>
-            <a:off x="666750" y="571500"/>
-            <a:ext cx="1238250" cy="1238250"/>
+            <a:off x="571500" y="476250"/>
+            <a:ext cx="952500" cy="952500"/>
           </a:xfrm>
           <a:prstGeom prst="rect">
             <a:avLst/>
@@ -4627,8 +4627,8 @@
         </p:nvSpPr>
         <p:spPr>
           <a:xfrm>
-            <a:off x="2571750" y="666750"/>
-            <a:ext cx="19050" cy="1143000"/>
+            <a:off x="1809750" y="523875"/>
+            <a:ext cx="19050" cy="857250"/>
           </a:xfrm>
           <a:prstGeom prst="rect">
             <a:avLst/>
@@ -4671,8 +4671,8 @@
         </p:nvSpPr>
         <p:spPr>
           <a:xfrm>
-            <a:off x="3048000" y="571500"/>
-            <a:ext cx="1238250" cy="1238250"/>
+            <a:off x="2190750" y="476250"/>
+            <a:ext cx="952500" cy="952500"/>
           </a:xfrm>
           <a:prstGeom prst="ellipse">
             <a:avLst/>
@@ -4715,8 +4715,8 @@
         </p:nvSpPr>
         <p:spPr>
           <a:xfrm>
-            <a:off x="3048000" y="571500"/>
-            <a:ext cx="1238250" cy="1238250"/>
+            <a:off x="2190750" y="476250"/>
+            <a:ext cx="952500" cy="952500"/>
           </a:xfrm>
           <a:prstGeom prst="rect">
             <a:avLst/>
@@ -4754,7 +4754,51 @@
         </p:nvSpPr>
         <p:spPr>
           <a:xfrm>
-            <a:off x="0" y="7620000"/>
+            <a:off x="0" y="9620250"/>
+            <a:ext cx="10287000" cy="3238500"/>
+          </a:xfrm>
+          <a:prstGeom prst="rect">
+            <a:avLst/>
+          </a:prstGeom>
+          <a:solidFill>
+            <a:srgbClr val="22371F"/>
+          </a:solidFill>
+          <a:ln>
+            <a:noFill/>
+          </a:ln>
+          <a:effectLst/>
+        </p:spPr>
+        <p:style>
+          <a:lnRef idx="1">
+            <a:schemeClr val="accent1"/>
+          </a:lnRef>
+          <a:fillRef idx="3">
+            <a:schemeClr val="accent1"/>
+          </a:fillRef>
+          <a:effectRef idx="2">
+            <a:schemeClr val="accent1"/>
+          </a:effectRef>
+          <a:fontRef idx="minor">
+            <a:schemeClr val="lt1"/>
+          </a:fontRef>
+        </p:style>
+        <p:txBody>
+          <a:bodyPr rtlCol="0" anchor="ctr"/>
+          <a:lstStyle/>
+          <a:p>
+            <a:pPr algn="ctr"/>
+          </a:p>
+        </p:txBody>
+      </p:sp>
+      <p:sp>
+        <p:nvSpPr>
+          <p:cNvPr id="18" name="Rectangle 17"/>
+          <p:cNvSpPr/>
+          <p:nvPr/>
+        </p:nvSpPr>
+        <p:spPr>
+          <a:xfrm>
+            <a:off x="0" y="8953500"/>
             <a:ext cx="10287000" cy="2190750"/>
           </a:xfrm>
           <a:prstGeom prst="rect">
@@ -4762,7 +4806,7 @@
           </a:prstGeom>
           <a:solidFill>
             <a:srgbClr val="22371F">
-              <a:alpha val="72000"/>
+              <a:alpha val="78000"/>
             </a:srgbClr>
           </a:solidFill>
           <a:ln>
@@ -4794,13 +4838,13 @@
       </p:sp>
       <p:sp>
         <p:nvSpPr>
-          <p:cNvPr id="18" name="Rectangle 17"/>
+          <p:cNvPr id="19" name="Rectangle 18"/>
           <p:cNvSpPr/>
           <p:nvPr/>
         </p:nvSpPr>
         <p:spPr>
           <a:xfrm>
-            <a:off x="0" y="7581900"/>
+            <a:off x="0" y="8915400"/>
             <a:ext cx="10287000" cy="38100"/>
           </a:xfrm>
           <a:prstGeom prst="rect">
@@ -4838,13 +4882,13 @@
       </p:sp>
       <p:sp>
         <p:nvSpPr>
-          <p:cNvPr id="19" name="Rectangle 18"/>
+          <p:cNvPr id="20" name="Rectangle 19"/>
           <p:cNvSpPr/>
           <p:nvPr/>
         </p:nvSpPr>
         <p:spPr>
           <a:xfrm>
-            <a:off x="0" y="7734300"/>
+            <a:off x="0" y="9048750"/>
             <a:ext cx="10287000" cy="19050"/>
           </a:xfrm>
           <a:prstGeom prst="rect">
@@ -4882,13 +4926,13 @@
       </p:sp>
       <p:sp>
         <p:nvSpPr>
-          <p:cNvPr id="20" name="Rectangle 19"/>
+          <p:cNvPr id="21" name="Rectangle 20"/>
           <p:cNvSpPr/>
           <p:nvPr/>
         </p:nvSpPr>
         <p:spPr>
           <a:xfrm>
-            <a:off x="0" y="9810750"/>
+            <a:off x="0" y="11144250"/>
             <a:ext cx="10287000" cy="38100"/>
           </a:xfrm>
           <a:prstGeom prst="rect">
@@ -4926,13 +4970,13 @@
       </p:sp>
       <p:sp>
         <p:nvSpPr>
-          <p:cNvPr id="21" name="TextBox 20"/>
+          <p:cNvPr id="22" name="TextBox 21"/>
           <p:cNvSpPr txBox="1"/>
           <p:nvPr/>
         </p:nvSpPr>
         <p:spPr>
           <a:xfrm>
-            <a:off x="762000" y="7905750"/>
+            <a:off x="762000" y="9191625"/>
             <a:ext cx="8572500" cy="1047750"/>
           </a:xfrm>
           <a:prstGeom prst="rect">
@@ -4965,13 +5009,13 @@
       </p:sp>
       <p:sp>
         <p:nvSpPr>
-          <p:cNvPr id="22" name="TextBox 21"/>
+          <p:cNvPr id="23" name="TextBox 22"/>
           <p:cNvSpPr txBox="1"/>
           <p:nvPr/>
         </p:nvSpPr>
         <p:spPr>
           <a:xfrm>
-            <a:off x="762000" y="8905875"/>
+            <a:off x="762000" y="10191750"/>
             <a:ext cx="8572500" cy="666750"/>
           </a:xfrm>
           <a:prstGeom prst="rect">
@@ -4998,6 +5042,45 @@
                 <a:latin typeface="Source Sans 3"/>
               </a:rPr>
               <a:t>SCIENCE LEADER</a:t>
+            </a:r>
+          </a:p>
+        </p:txBody>
+      </p:sp>
+      <p:sp>
+        <p:nvSpPr>
+          <p:cNvPr id="24" name="TextBox 23"/>
+          <p:cNvSpPr txBox="1"/>
+          <p:nvPr/>
+        </p:nvSpPr>
+        <p:spPr>
+          <a:xfrm>
+            <a:off x="762000" y="11763375"/>
+            <a:ext cx="8763000" cy="476250"/>
+          </a:xfrm>
+          <a:prstGeom prst="rect">
+            <a:avLst/>
+          </a:prstGeom>
+          <a:noFill/>
+        </p:spPr>
+        <p:txBody>
+          <a:bodyPr wrap="square" lIns="0" rIns="0" tIns="0" bIns="0" anchor="t">
+            <a:spAutoFit/>
+          </a:bodyPr>
+          <a:lstStyle/>
+          <a:p>
+            <a:pPr algn="l">
+              <a:lnSpc>
+                <a:spcPct val="120000"/>
+              </a:lnSpc>
+            </a:pPr>
+            <a:r>
+              <a:rPr sz="3000" b="0" i="0">
+                <a:solidFill>
+                  <a:srgbClr val="F4F1EA"/>
+                </a:solidFill>
+                <a:latin typeface="Source Sans 3"/>
+              </a:rPr>
+              <a:t>@soilfoodwebschool</a:t>
             </a:r>
           </a:p>
         </p:txBody>
@@ -5030,7 +5113,7 @@
       <p:grpSpPr/>
       <p:pic>
         <p:nvPicPr>
-          <p:cNvPr id="2" name="Picture 1" descr="6892541509162598841.jpg"/>
+          <p:cNvPr id="2" name="Picture 1" descr="5080328754071181355.jpg"/>
           <p:cNvPicPr>
             <a:picLocks noChangeAspect="1"/>
           </p:cNvPicPr>
@@ -5045,7 +5128,7 @@
         <p:spPr>
           <a:xfrm>
             <a:off x="0" y="0"/>
-            <a:ext cx="10287000" cy="12858750"/>
+            <a:ext cx="10287000" cy="9620250"/>
           </a:xfrm>
           <a:prstGeom prst="rect">
             <a:avLst/>
@@ -5725,11 +5808,11 @@
         <p:spPr>
           <a:xfrm>
             <a:off x="-571500" y="-571500"/>
-            <a:ext cx="5905500" cy="3048000"/>
+            <a:ext cx="4381500" cy="2476500"/>
           </a:xfrm>
           <a:prstGeom prst="roundRect">
             <a:avLst>
-              <a:gd name="adj" fmla="val 12500"/>
+              <a:gd name="adj" fmla="val 15384"/>
             </a:avLst>
           </a:prstGeom>
           <a:solidFill>
@@ -5772,8 +5855,8 @@
         </p:nvSpPr>
         <p:spPr>
           <a:xfrm>
-            <a:off x="666750" y="571500"/>
-            <a:ext cx="1238250" cy="1238250"/>
+            <a:off x="571500" y="476250"/>
+            <a:ext cx="952500" cy="952500"/>
           </a:xfrm>
           <a:prstGeom prst="ellipse">
             <a:avLst/>
@@ -5816,8 +5899,8 @@
         </p:nvSpPr>
         <p:spPr>
           <a:xfrm>
-            <a:off x="666750" y="571500"/>
-            <a:ext cx="1238250" cy="1238250"/>
+            <a:off x="571500" y="476250"/>
+            <a:ext cx="952500" cy="952500"/>
           </a:xfrm>
           <a:prstGeom prst="rect">
             <a:avLst/>
@@ -5855,8 +5938,8 @@
         </p:nvSpPr>
         <p:spPr>
           <a:xfrm>
-            <a:off x="2571750" y="666750"/>
-            <a:ext cx="19050" cy="1143000"/>
+            <a:off x="1809750" y="523875"/>
+            <a:ext cx="19050" cy="857250"/>
           </a:xfrm>
           <a:prstGeom prst="rect">
             <a:avLst/>
@@ -5899,8 +5982,8 @@
         </p:nvSpPr>
         <p:spPr>
           <a:xfrm>
-            <a:off x="3048000" y="571500"/>
-            <a:ext cx="1238250" cy="1238250"/>
+            <a:off x="2190750" y="476250"/>
+            <a:ext cx="952500" cy="952500"/>
           </a:xfrm>
           <a:prstGeom prst="ellipse">
             <a:avLst/>
@@ -5943,8 +6026,8 @@
         </p:nvSpPr>
         <p:spPr>
           <a:xfrm>
-            <a:off x="3048000" y="571500"/>
-            <a:ext cx="1238250" cy="1238250"/>
+            <a:off x="2190750" y="476250"/>
+            <a:ext cx="952500" cy="952500"/>
           </a:xfrm>
           <a:prstGeom prst="rect">
             <a:avLst/>
@@ -5982,7 +6065,51 @@
         </p:nvSpPr>
         <p:spPr>
           <a:xfrm>
-            <a:off x="0" y="7620000"/>
+            <a:off x="0" y="9620250"/>
+            <a:ext cx="10287000" cy="3238500"/>
+          </a:xfrm>
+          <a:prstGeom prst="rect">
+            <a:avLst/>
+          </a:prstGeom>
+          <a:solidFill>
+            <a:srgbClr val="22371F"/>
+          </a:solidFill>
+          <a:ln>
+            <a:noFill/>
+          </a:ln>
+          <a:effectLst/>
+        </p:spPr>
+        <p:style>
+          <a:lnRef idx="1">
+            <a:schemeClr val="accent1"/>
+          </a:lnRef>
+          <a:fillRef idx="3">
+            <a:schemeClr val="accent1"/>
+          </a:fillRef>
+          <a:effectRef idx="2">
+            <a:schemeClr val="accent1"/>
+          </a:effectRef>
+          <a:fontRef idx="minor">
+            <a:schemeClr val="lt1"/>
+          </a:fontRef>
+        </p:style>
+        <p:txBody>
+          <a:bodyPr rtlCol="0" anchor="ctr"/>
+          <a:lstStyle/>
+          <a:p>
+            <a:pPr algn="ctr"/>
+          </a:p>
+        </p:txBody>
+      </p:sp>
+      <p:sp>
+        <p:nvSpPr>
+          <p:cNvPr id="18" name="Rectangle 17"/>
+          <p:cNvSpPr/>
+          <p:nvPr/>
+        </p:nvSpPr>
+        <p:spPr>
+          <a:xfrm>
+            <a:off x="0" y="8953500"/>
             <a:ext cx="10287000" cy="2190750"/>
           </a:xfrm>
           <a:prstGeom prst="rect">
@@ -5990,7 +6117,7 @@
           </a:prstGeom>
           <a:solidFill>
             <a:srgbClr val="22371F">
-              <a:alpha val="72000"/>
+              <a:alpha val="78000"/>
             </a:srgbClr>
           </a:solidFill>
           <a:ln>
@@ -6022,13 +6149,13 @@
       </p:sp>
       <p:sp>
         <p:nvSpPr>
-          <p:cNvPr id="18" name="Rectangle 17"/>
+          <p:cNvPr id="19" name="Rectangle 18"/>
           <p:cNvSpPr/>
           <p:nvPr/>
         </p:nvSpPr>
         <p:spPr>
           <a:xfrm>
-            <a:off x="0" y="7581900"/>
+            <a:off x="0" y="8915400"/>
             <a:ext cx="10287000" cy="38100"/>
           </a:xfrm>
           <a:prstGeom prst="rect">
@@ -6066,13 +6193,13 @@
       </p:sp>
       <p:sp>
         <p:nvSpPr>
-          <p:cNvPr id="19" name="Rectangle 18"/>
+          <p:cNvPr id="20" name="Rectangle 19"/>
           <p:cNvSpPr/>
           <p:nvPr/>
         </p:nvSpPr>
         <p:spPr>
           <a:xfrm>
-            <a:off x="0" y="7734300"/>
+            <a:off x="0" y="9048750"/>
             <a:ext cx="10287000" cy="19050"/>
           </a:xfrm>
           <a:prstGeom prst="rect">
@@ -6110,13 +6237,13 @@
       </p:sp>
       <p:sp>
         <p:nvSpPr>
-          <p:cNvPr id="20" name="Rectangle 19"/>
+          <p:cNvPr id="21" name="Rectangle 20"/>
           <p:cNvSpPr/>
           <p:nvPr/>
         </p:nvSpPr>
         <p:spPr>
           <a:xfrm>
-            <a:off x="0" y="9810750"/>
+            <a:off x="0" y="11144250"/>
             <a:ext cx="10287000" cy="38100"/>
           </a:xfrm>
           <a:prstGeom prst="rect">
@@ -6154,13 +6281,13 @@
       </p:sp>
       <p:sp>
         <p:nvSpPr>
-          <p:cNvPr id="21" name="TextBox 20"/>
+          <p:cNvPr id="22" name="TextBox 21"/>
           <p:cNvSpPr txBox="1"/>
           <p:nvPr/>
         </p:nvSpPr>
         <p:spPr>
           <a:xfrm>
-            <a:off x="762000" y="7905750"/>
+            <a:off x="762000" y="9191625"/>
             <a:ext cx="8572500" cy="1047750"/>
           </a:xfrm>
           <a:prstGeom prst="rect">
@@ -6193,13 +6320,13 @@
       </p:sp>
       <p:sp>
         <p:nvSpPr>
-          <p:cNvPr id="22" name="TextBox 21"/>
+          <p:cNvPr id="23" name="TextBox 22"/>
           <p:cNvSpPr txBox="1"/>
           <p:nvPr/>
         </p:nvSpPr>
         <p:spPr>
           <a:xfrm>
-            <a:off x="762000" y="8905875"/>
+            <a:off x="762000" y="10191750"/>
             <a:ext cx="8572500" cy="666750"/>
           </a:xfrm>
           <a:prstGeom prst="rect">
@@ -6226,6 +6353,45 @@
                 <a:latin typeface="Source Sans 3"/>
               </a:rPr>
               <a:t>FARMER, NORFOLK</a:t>
+            </a:r>
+          </a:p>
+        </p:txBody>
+      </p:sp>
+      <p:sp>
+        <p:nvSpPr>
+          <p:cNvPr id="24" name="TextBox 23"/>
+          <p:cNvSpPr txBox="1"/>
+          <p:nvPr/>
+        </p:nvSpPr>
+        <p:spPr>
+          <a:xfrm>
+            <a:off x="762000" y="11763375"/>
+            <a:ext cx="8763000" cy="476250"/>
+          </a:xfrm>
+          <a:prstGeom prst="rect">
+            <a:avLst/>
+          </a:prstGeom>
+          <a:noFill/>
+        </p:spPr>
+        <p:txBody>
+          <a:bodyPr wrap="square" lIns="0" rIns="0" tIns="0" bIns="0" anchor="t">
+            <a:spAutoFit/>
+          </a:bodyPr>
+          <a:lstStyle/>
+          <a:p>
+            <a:pPr algn="l">
+              <a:lnSpc>
+                <a:spcPct val="120000"/>
+              </a:lnSpc>
+            </a:pPr>
+            <a:r>
+              <a:rPr sz="3000" b="0" i="0">
+                <a:solidFill>
+                  <a:srgbClr val="F4F1EA"/>
+                </a:solidFill>
+                <a:latin typeface="Source Sans 3"/>
+              </a:rPr>
+              <a:t>@soilfoodwebschool</a:t>
             </a:r>
           </a:p>
         </p:txBody>
@@ -6258,7 +6424,7 @@
       <p:grpSpPr/>
       <p:pic>
         <p:nvPicPr>
-          <p:cNvPr id="2" name="Picture 1" descr="7500802371811747991.jpg"/>
+          <p:cNvPr id="2" name="Picture 1" descr="1186483563729423873.jpg"/>
           <p:cNvPicPr>
             <a:picLocks noChangeAspect="1"/>
           </p:cNvPicPr>
@@ -6273,7 +6439,7 @@
         <p:spPr>
           <a:xfrm>
             <a:off x="0" y="0"/>
-            <a:ext cx="10287000" cy="12858750"/>
+            <a:ext cx="10287000" cy="9620250"/>
           </a:xfrm>
           <a:prstGeom prst="rect">
             <a:avLst/>
@@ -6953,11 +7119,11 @@
         <p:spPr>
           <a:xfrm>
             <a:off x="-571500" y="-571500"/>
-            <a:ext cx="5905500" cy="3048000"/>
+            <a:ext cx="4381500" cy="2476500"/>
           </a:xfrm>
           <a:prstGeom prst="roundRect">
             <a:avLst>
-              <a:gd name="adj" fmla="val 12500"/>
+              <a:gd name="adj" fmla="val 15384"/>
             </a:avLst>
           </a:prstGeom>
           <a:solidFill>
@@ -7000,8 +7166,8 @@
         </p:nvSpPr>
         <p:spPr>
           <a:xfrm>
-            <a:off x="666750" y="571500"/>
-            <a:ext cx="1238250" cy="1238250"/>
+            <a:off x="571500" y="476250"/>
+            <a:ext cx="952500" cy="952500"/>
           </a:xfrm>
           <a:prstGeom prst="ellipse">
             <a:avLst/>
@@ -7044,8 +7210,8 @@
         </p:nvSpPr>
         <p:spPr>
           <a:xfrm>
-            <a:off x="666750" y="571500"/>
-            <a:ext cx="1238250" cy="1238250"/>
+            <a:off x="571500" y="476250"/>
+            <a:ext cx="952500" cy="952500"/>
           </a:xfrm>
           <a:prstGeom prst="rect">
             <a:avLst/>
@@ -7083,8 +7249,8 @@
         </p:nvSpPr>
         <p:spPr>
           <a:xfrm>
-            <a:off x="2571750" y="666750"/>
-            <a:ext cx="19050" cy="1143000"/>
+            <a:off x="1809750" y="523875"/>
+            <a:ext cx="19050" cy="857250"/>
           </a:xfrm>
           <a:prstGeom prst="rect">
             <a:avLst/>
@@ -7127,8 +7293,8 @@
         </p:nvSpPr>
         <p:spPr>
           <a:xfrm>
-            <a:off x="3048000" y="571500"/>
-            <a:ext cx="1238250" cy="1238250"/>
+            <a:off x="2190750" y="476250"/>
+            <a:ext cx="952500" cy="952500"/>
           </a:xfrm>
           <a:prstGeom prst="ellipse">
             <a:avLst/>
@@ -7171,8 +7337,8 @@
         </p:nvSpPr>
         <p:spPr>
           <a:xfrm>
-            <a:off x="3048000" y="571500"/>
-            <a:ext cx="1238250" cy="1238250"/>
+            <a:off x="2190750" y="476250"/>
+            <a:ext cx="952500" cy="952500"/>
           </a:xfrm>
           <a:prstGeom prst="rect">
             <a:avLst/>
@@ -7210,7 +7376,51 @@
         </p:nvSpPr>
         <p:spPr>
           <a:xfrm>
-            <a:off x="0" y="7620000"/>
+            <a:off x="0" y="9620250"/>
+            <a:ext cx="10287000" cy="3238500"/>
+          </a:xfrm>
+          <a:prstGeom prst="rect">
+            <a:avLst/>
+          </a:prstGeom>
+          <a:solidFill>
+            <a:srgbClr val="22371F"/>
+          </a:solidFill>
+          <a:ln>
+            <a:noFill/>
+          </a:ln>
+          <a:effectLst/>
+        </p:spPr>
+        <p:style>
+          <a:lnRef idx="1">
+            <a:schemeClr val="accent1"/>
+          </a:lnRef>
+          <a:fillRef idx="3">
+            <a:schemeClr val="accent1"/>
+          </a:fillRef>
+          <a:effectRef idx="2">
+            <a:schemeClr val="accent1"/>
+          </a:effectRef>
+          <a:fontRef idx="minor">
+            <a:schemeClr val="lt1"/>
+          </a:fontRef>
+        </p:style>
+        <p:txBody>
+          <a:bodyPr rtlCol="0" anchor="ctr"/>
+          <a:lstStyle/>
+          <a:p>
+            <a:pPr algn="ctr"/>
+          </a:p>
+        </p:txBody>
+      </p:sp>
+      <p:sp>
+        <p:nvSpPr>
+          <p:cNvPr id="18" name="Rectangle 17"/>
+          <p:cNvSpPr/>
+          <p:nvPr/>
+        </p:nvSpPr>
+        <p:spPr>
+          <a:xfrm>
+            <a:off x="0" y="8953500"/>
             <a:ext cx="10287000" cy="2190750"/>
           </a:xfrm>
           <a:prstGeom prst="rect">
@@ -7218,7 +7428,7 @@
           </a:prstGeom>
           <a:solidFill>
             <a:srgbClr val="22371F">
-              <a:alpha val="72000"/>
+              <a:alpha val="78000"/>
             </a:srgbClr>
           </a:solidFill>
           <a:ln>
@@ -7250,13 +7460,13 @@
       </p:sp>
       <p:sp>
         <p:nvSpPr>
-          <p:cNvPr id="18" name="Rectangle 17"/>
+          <p:cNvPr id="19" name="Rectangle 18"/>
           <p:cNvSpPr/>
           <p:nvPr/>
         </p:nvSpPr>
         <p:spPr>
           <a:xfrm>
-            <a:off x="0" y="7581900"/>
+            <a:off x="0" y="8915400"/>
             <a:ext cx="10287000" cy="38100"/>
           </a:xfrm>
           <a:prstGeom prst="rect">
@@ -7294,13 +7504,13 @@
       </p:sp>
       <p:sp>
         <p:nvSpPr>
-          <p:cNvPr id="19" name="Rectangle 18"/>
+          <p:cNvPr id="20" name="Rectangle 19"/>
           <p:cNvSpPr/>
           <p:nvPr/>
         </p:nvSpPr>
         <p:spPr>
           <a:xfrm>
-            <a:off x="0" y="7734300"/>
+            <a:off x="0" y="9048750"/>
             <a:ext cx="10287000" cy="19050"/>
           </a:xfrm>
           <a:prstGeom prst="rect">
@@ -7338,13 +7548,13 @@
       </p:sp>
       <p:sp>
         <p:nvSpPr>
-          <p:cNvPr id="20" name="Rectangle 19"/>
+          <p:cNvPr id="21" name="Rectangle 20"/>
           <p:cNvSpPr/>
           <p:nvPr/>
         </p:nvSpPr>
         <p:spPr>
           <a:xfrm>
-            <a:off x="0" y="9810750"/>
+            <a:off x="0" y="11144250"/>
             <a:ext cx="10287000" cy="38100"/>
           </a:xfrm>
           <a:prstGeom prst="rect">
@@ -7382,13 +7592,13 @@
       </p:sp>
       <p:sp>
         <p:nvSpPr>
-          <p:cNvPr id="21" name="TextBox 20"/>
+          <p:cNvPr id="22" name="TextBox 21"/>
           <p:cNvSpPr txBox="1"/>
           <p:nvPr/>
         </p:nvSpPr>
         <p:spPr>
           <a:xfrm>
-            <a:off x="762000" y="7905750"/>
+            <a:off x="762000" y="9191625"/>
             <a:ext cx="8572500" cy="1047750"/>
           </a:xfrm>
           <a:prstGeom prst="rect">
@@ -7421,13 +7631,13 @@
       </p:sp>
       <p:sp>
         <p:nvSpPr>
-          <p:cNvPr id="22" name="TextBox 21"/>
+          <p:cNvPr id="23" name="TextBox 22"/>
           <p:cNvSpPr txBox="1"/>
           <p:nvPr/>
         </p:nvSpPr>
         <p:spPr>
           <a:xfrm>
-            <a:off x="762000" y="8905875"/>
+            <a:off x="762000" y="10191750"/>
             <a:ext cx="8572500" cy="666750"/>
           </a:xfrm>
           <a:prstGeom prst="rect">
@@ -7454,6 +7664,45 @@
                 <a:latin typeface="Source Sans 3"/>
               </a:rPr>
               <a:t>MICROSCOPY</a:t>
+            </a:r>
+          </a:p>
+        </p:txBody>
+      </p:sp>
+      <p:sp>
+        <p:nvSpPr>
+          <p:cNvPr id="24" name="TextBox 23"/>
+          <p:cNvSpPr txBox="1"/>
+          <p:nvPr/>
+        </p:nvSpPr>
+        <p:spPr>
+          <a:xfrm>
+            <a:off x="762000" y="11763375"/>
+            <a:ext cx="8763000" cy="476250"/>
+          </a:xfrm>
+          <a:prstGeom prst="rect">
+            <a:avLst/>
+          </a:prstGeom>
+          <a:noFill/>
+        </p:spPr>
+        <p:txBody>
+          <a:bodyPr wrap="square" lIns="0" rIns="0" tIns="0" bIns="0" anchor="t">
+            <a:spAutoFit/>
+          </a:bodyPr>
+          <a:lstStyle/>
+          <a:p>
+            <a:pPr algn="l">
+              <a:lnSpc>
+                <a:spcPct val="120000"/>
+              </a:lnSpc>
+            </a:pPr>
+            <a:r>
+              <a:rPr sz="3000" b="0" i="0">
+                <a:solidFill>
+                  <a:srgbClr val="F4F1EA"/>
+                </a:solidFill>
+                <a:latin typeface="Source Sans 3"/>
+              </a:rPr>
+              <a:t>@soilfoodwebschool</a:t>
             </a:r>
           </a:p>
         </p:txBody>
@@ -7486,7 +7735,7 @@
       <p:grpSpPr/>
       <p:pic>
         <p:nvPicPr>
-          <p:cNvPr id="2" name="Picture 1" descr="7616125880658272022.jpg"/>
+          <p:cNvPr id="2" name="Picture 1" descr="5390912766246518019.jpg"/>
           <p:cNvPicPr>
             <a:picLocks noChangeAspect="1"/>
           </p:cNvPicPr>
@@ -7501,7 +7750,7 @@
         <p:spPr>
           <a:xfrm>
             <a:off x="0" y="0"/>
-            <a:ext cx="10287000" cy="12858750"/>
+            <a:ext cx="10287000" cy="9620250"/>
           </a:xfrm>
           <a:prstGeom prst="rect">
             <a:avLst/>
@@ -8181,11 +8430,11 @@
         <p:spPr>
           <a:xfrm>
             <a:off x="-571500" y="-571500"/>
-            <a:ext cx="5905500" cy="3048000"/>
+            <a:ext cx="4381500" cy="2476500"/>
           </a:xfrm>
           <a:prstGeom prst="roundRect">
             <a:avLst>
-              <a:gd name="adj" fmla="val 12500"/>
+              <a:gd name="adj" fmla="val 15384"/>
             </a:avLst>
           </a:prstGeom>
           <a:solidFill>
@@ -8228,8 +8477,8 @@
         </p:nvSpPr>
         <p:spPr>
           <a:xfrm>
-            <a:off x="666750" y="571500"/>
-            <a:ext cx="1238250" cy="1238250"/>
+            <a:off x="571500" y="476250"/>
+            <a:ext cx="952500" cy="952500"/>
           </a:xfrm>
           <a:prstGeom prst="ellipse">
             <a:avLst/>
@@ -8272,8 +8521,8 @@
         </p:nvSpPr>
         <p:spPr>
           <a:xfrm>
-            <a:off x="666750" y="571500"/>
-            <a:ext cx="1238250" cy="1238250"/>
+            <a:off x="571500" y="476250"/>
+            <a:ext cx="952500" cy="952500"/>
           </a:xfrm>
           <a:prstGeom prst="rect">
             <a:avLst/>
@@ -8311,8 +8560,8 @@
         </p:nvSpPr>
         <p:spPr>
           <a:xfrm>
-            <a:off x="2571750" y="666750"/>
-            <a:ext cx="19050" cy="1143000"/>
+            <a:off x="1809750" y="523875"/>
+            <a:ext cx="19050" cy="857250"/>
           </a:xfrm>
           <a:prstGeom prst="rect">
             <a:avLst/>
@@ -8355,8 +8604,8 @@
         </p:nvSpPr>
         <p:spPr>
           <a:xfrm>
-            <a:off x="3048000" y="571500"/>
-            <a:ext cx="1238250" cy="1238250"/>
+            <a:off x="2190750" y="476250"/>
+            <a:ext cx="952500" cy="952500"/>
           </a:xfrm>
           <a:prstGeom prst="ellipse">
             <a:avLst/>
@@ -8399,8 +8648,8 @@
         </p:nvSpPr>
         <p:spPr>
           <a:xfrm>
-            <a:off x="3048000" y="571500"/>
-            <a:ext cx="1238250" cy="1238250"/>
+            <a:off x="2190750" y="476250"/>
+            <a:ext cx="952500" cy="952500"/>
           </a:xfrm>
           <a:prstGeom prst="rect">
             <a:avLst/>
@@ -8438,7 +8687,51 @@
         </p:nvSpPr>
         <p:spPr>
           <a:xfrm>
-            <a:off x="0" y="7620000"/>
+            <a:off x="0" y="9620250"/>
+            <a:ext cx="10287000" cy="3238500"/>
+          </a:xfrm>
+          <a:prstGeom prst="rect">
+            <a:avLst/>
+          </a:prstGeom>
+          <a:solidFill>
+            <a:srgbClr val="22371F"/>
+          </a:solidFill>
+          <a:ln>
+            <a:noFill/>
+          </a:ln>
+          <a:effectLst/>
+        </p:spPr>
+        <p:style>
+          <a:lnRef idx="1">
+            <a:schemeClr val="accent1"/>
+          </a:lnRef>
+          <a:fillRef idx="3">
+            <a:schemeClr val="accent1"/>
+          </a:fillRef>
+          <a:effectRef idx="2">
+            <a:schemeClr val="accent1"/>
+          </a:effectRef>
+          <a:fontRef idx="minor">
+            <a:schemeClr val="lt1"/>
+          </a:fontRef>
+        </p:style>
+        <p:txBody>
+          <a:bodyPr rtlCol="0" anchor="ctr"/>
+          <a:lstStyle/>
+          <a:p>
+            <a:pPr algn="ctr"/>
+          </a:p>
+        </p:txBody>
+      </p:sp>
+      <p:sp>
+        <p:nvSpPr>
+          <p:cNvPr id="18" name="Rectangle 17"/>
+          <p:cNvSpPr/>
+          <p:nvPr/>
+        </p:nvSpPr>
+        <p:spPr>
+          <a:xfrm>
+            <a:off x="0" y="8953500"/>
             <a:ext cx="10287000" cy="2190750"/>
           </a:xfrm>
           <a:prstGeom prst="rect">
@@ -8446,7 +8739,7 @@
           </a:prstGeom>
           <a:solidFill>
             <a:srgbClr val="22371F">
-              <a:alpha val="72000"/>
+              <a:alpha val="78000"/>
             </a:srgbClr>
           </a:solidFill>
           <a:ln>
@@ -8478,13 +8771,13 @@
       </p:sp>
       <p:sp>
         <p:nvSpPr>
-          <p:cNvPr id="18" name="Rectangle 17"/>
+          <p:cNvPr id="19" name="Rectangle 18"/>
           <p:cNvSpPr/>
           <p:nvPr/>
         </p:nvSpPr>
         <p:spPr>
           <a:xfrm>
-            <a:off x="0" y="7581900"/>
+            <a:off x="0" y="8915400"/>
             <a:ext cx="10287000" cy="38100"/>
           </a:xfrm>
           <a:prstGeom prst="rect">
@@ -8522,13 +8815,13 @@
       </p:sp>
       <p:sp>
         <p:nvSpPr>
-          <p:cNvPr id="19" name="Rectangle 18"/>
+          <p:cNvPr id="20" name="Rectangle 19"/>
           <p:cNvSpPr/>
           <p:nvPr/>
         </p:nvSpPr>
         <p:spPr>
           <a:xfrm>
-            <a:off x="0" y="7734300"/>
+            <a:off x="0" y="9048750"/>
             <a:ext cx="10287000" cy="19050"/>
           </a:xfrm>
           <a:prstGeom prst="rect">
@@ -8566,13 +8859,13 @@
       </p:sp>
       <p:sp>
         <p:nvSpPr>
-          <p:cNvPr id="20" name="Rectangle 19"/>
+          <p:cNvPr id="21" name="Rectangle 20"/>
           <p:cNvSpPr/>
           <p:nvPr/>
         </p:nvSpPr>
         <p:spPr>
           <a:xfrm>
-            <a:off x="0" y="9810750"/>
+            <a:off x="0" y="11144250"/>
             <a:ext cx="10287000" cy="38100"/>
           </a:xfrm>
           <a:prstGeom prst="rect">
@@ -8610,13 +8903,13 @@
       </p:sp>
       <p:sp>
         <p:nvSpPr>
-          <p:cNvPr id="21" name="TextBox 20"/>
+          <p:cNvPr id="22" name="TextBox 21"/>
           <p:cNvSpPr txBox="1"/>
           <p:nvPr/>
         </p:nvSpPr>
         <p:spPr>
           <a:xfrm>
-            <a:off x="762000" y="7905750"/>
+            <a:off x="762000" y="9191625"/>
             <a:ext cx="8572500" cy="1047750"/>
           </a:xfrm>
           <a:prstGeom prst="rect">
@@ -8649,13 +8942,13 @@
       </p:sp>
       <p:sp>
         <p:nvSpPr>
-          <p:cNvPr id="22" name="TextBox 21"/>
+          <p:cNvPr id="23" name="TextBox 22"/>
           <p:cNvSpPr txBox="1"/>
           <p:nvPr/>
         </p:nvSpPr>
         <p:spPr>
           <a:xfrm>
-            <a:off x="762000" y="8905875"/>
+            <a:off x="762000" y="10191750"/>
             <a:ext cx="8572500" cy="666750"/>
           </a:xfrm>
           <a:prstGeom prst="rect">
@@ -8682,6 +8975,45 @@
                 <a:latin typeface="Source Sans 3"/>
               </a:rPr>
               <a:t>COMPOST EXTRACTS AND TEAS</a:t>
+            </a:r>
+          </a:p>
+        </p:txBody>
+      </p:sp>
+      <p:sp>
+        <p:nvSpPr>
+          <p:cNvPr id="24" name="TextBox 23"/>
+          <p:cNvSpPr txBox="1"/>
+          <p:nvPr/>
+        </p:nvSpPr>
+        <p:spPr>
+          <a:xfrm>
+            <a:off x="762000" y="11763375"/>
+            <a:ext cx="8763000" cy="476250"/>
+          </a:xfrm>
+          <a:prstGeom prst="rect">
+            <a:avLst/>
+          </a:prstGeom>
+          <a:noFill/>
+        </p:spPr>
+        <p:txBody>
+          <a:bodyPr wrap="square" lIns="0" rIns="0" tIns="0" bIns="0" anchor="t">
+            <a:spAutoFit/>
+          </a:bodyPr>
+          <a:lstStyle/>
+          <a:p>
+            <a:pPr algn="l">
+              <a:lnSpc>
+                <a:spcPct val="120000"/>
+              </a:lnSpc>
+            </a:pPr>
+            <a:r>
+              <a:rPr sz="3000" b="0" i="0">
+                <a:solidFill>
+                  <a:srgbClr val="F4F1EA"/>
+                </a:solidFill>
+                <a:latin typeface="Source Sans 3"/>
+              </a:rPr>
+              <a:t>@soilfoodwebschool</a:t>
             </a:r>
           </a:p>
         </p:txBody>
@@ -8721,7 +9053,7 @@
         <p:spPr>
           <a:xfrm>
             <a:off x="0" y="0"/>
-            <a:ext cx="10287000" cy="12858750"/>
+            <a:ext cx="10287000" cy="9620250"/>
           </a:xfrm>
           <a:prstGeom prst="rect">
             <a:avLst/>
@@ -8765,7 +9097,7 @@
         <p:spPr>
           <a:xfrm>
             <a:off x="152400" y="0"/>
-            <a:ext cx="9982200" cy="12858750"/>
+            <a:ext cx="9982200" cy="9620250"/>
           </a:xfrm>
           <a:prstGeom prst="rect">
             <a:avLst/>
@@ -9468,11 +9800,11 @@
         <p:spPr>
           <a:xfrm>
             <a:off x="-571500" y="-571500"/>
-            <a:ext cx="5905500" cy="3048000"/>
+            <a:ext cx="4381500" cy="2476500"/>
           </a:xfrm>
           <a:prstGeom prst="roundRect">
             <a:avLst>
-              <a:gd name="adj" fmla="val 12500"/>
+              <a:gd name="adj" fmla="val 15384"/>
             </a:avLst>
           </a:prstGeom>
           <a:solidFill>
@@ -9515,8 +9847,8 @@
         </p:nvSpPr>
         <p:spPr>
           <a:xfrm>
-            <a:off x="666750" y="571500"/>
-            <a:ext cx="1238250" cy="1238250"/>
+            <a:off x="571500" y="476250"/>
+            <a:ext cx="952500" cy="952500"/>
           </a:xfrm>
           <a:prstGeom prst="ellipse">
             <a:avLst/>
@@ -9559,8 +9891,8 @@
         </p:nvSpPr>
         <p:spPr>
           <a:xfrm>
-            <a:off x="666750" y="571500"/>
-            <a:ext cx="1238250" cy="1238250"/>
+            <a:off x="571500" y="476250"/>
+            <a:ext cx="952500" cy="952500"/>
           </a:xfrm>
           <a:prstGeom prst="rect">
             <a:avLst/>
@@ -9598,8 +9930,8 @@
         </p:nvSpPr>
         <p:spPr>
           <a:xfrm>
-            <a:off x="2571750" y="666750"/>
-            <a:ext cx="19050" cy="1143000"/>
+            <a:off x="1809750" y="523875"/>
+            <a:ext cx="19050" cy="857250"/>
           </a:xfrm>
           <a:prstGeom prst="rect">
             <a:avLst/>
@@ -9642,8 +9974,8 @@
         </p:nvSpPr>
         <p:spPr>
           <a:xfrm>
-            <a:off x="3048000" y="571500"/>
-            <a:ext cx="1238250" cy="1238250"/>
+            <a:off x="2190750" y="476250"/>
+            <a:ext cx="952500" cy="952500"/>
           </a:xfrm>
           <a:prstGeom prst="ellipse">
             <a:avLst/>
@@ -9686,8 +10018,8 @@
         </p:nvSpPr>
         <p:spPr>
           <a:xfrm>
-            <a:off x="3048000" y="571500"/>
-            <a:ext cx="1238250" cy="1238250"/>
+            <a:off x="2190750" y="476250"/>
+            <a:ext cx="952500" cy="952500"/>
           </a:xfrm>
           <a:prstGeom prst="rect">
             <a:avLst/>
@@ -9725,7 +10057,51 @@
         </p:nvSpPr>
         <p:spPr>
           <a:xfrm>
-            <a:off x="0" y="7620000"/>
+            <a:off x="0" y="9620250"/>
+            <a:ext cx="10287000" cy="3238500"/>
+          </a:xfrm>
+          <a:prstGeom prst="rect">
+            <a:avLst/>
+          </a:prstGeom>
+          <a:solidFill>
+            <a:srgbClr val="22371F"/>
+          </a:solidFill>
+          <a:ln>
+            <a:noFill/>
+          </a:ln>
+          <a:effectLst/>
+        </p:spPr>
+        <p:style>
+          <a:lnRef idx="1">
+            <a:schemeClr val="accent1"/>
+          </a:lnRef>
+          <a:fillRef idx="3">
+            <a:schemeClr val="accent1"/>
+          </a:fillRef>
+          <a:effectRef idx="2">
+            <a:schemeClr val="accent1"/>
+          </a:effectRef>
+          <a:fontRef idx="minor">
+            <a:schemeClr val="lt1"/>
+          </a:fontRef>
+        </p:style>
+        <p:txBody>
+          <a:bodyPr rtlCol="0" anchor="ctr"/>
+          <a:lstStyle/>
+          <a:p>
+            <a:pPr algn="ctr"/>
+          </a:p>
+        </p:txBody>
+      </p:sp>
+      <p:sp>
+        <p:nvSpPr>
+          <p:cNvPr id="19" name="Rectangle 18"/>
+          <p:cNvSpPr/>
+          <p:nvPr/>
+        </p:nvSpPr>
+        <p:spPr>
+          <a:xfrm>
+            <a:off x="0" y="8953500"/>
             <a:ext cx="10287000" cy="2190750"/>
           </a:xfrm>
           <a:prstGeom prst="rect">
@@ -9733,7 +10109,7 @@
           </a:prstGeom>
           <a:solidFill>
             <a:srgbClr val="22371F">
-              <a:alpha val="72000"/>
+              <a:alpha val="78000"/>
             </a:srgbClr>
           </a:solidFill>
           <a:ln>
@@ -9765,13 +10141,13 @@
       </p:sp>
       <p:sp>
         <p:nvSpPr>
-          <p:cNvPr id="19" name="Rectangle 18"/>
+          <p:cNvPr id="20" name="Rectangle 19"/>
           <p:cNvSpPr/>
           <p:nvPr/>
         </p:nvSpPr>
         <p:spPr>
           <a:xfrm>
-            <a:off x="0" y="7581900"/>
+            <a:off x="0" y="8915400"/>
             <a:ext cx="10287000" cy="38100"/>
           </a:xfrm>
           <a:prstGeom prst="rect">
@@ -9809,13 +10185,13 @@
       </p:sp>
       <p:sp>
         <p:nvSpPr>
-          <p:cNvPr id="20" name="Rectangle 19"/>
+          <p:cNvPr id="21" name="Rectangle 20"/>
           <p:cNvSpPr/>
           <p:nvPr/>
         </p:nvSpPr>
         <p:spPr>
           <a:xfrm>
-            <a:off x="0" y="7734300"/>
+            <a:off x="0" y="9048750"/>
             <a:ext cx="10287000" cy="19050"/>
           </a:xfrm>
           <a:prstGeom prst="rect">
@@ -9853,13 +10229,13 @@
       </p:sp>
       <p:sp>
         <p:nvSpPr>
-          <p:cNvPr id="21" name="Rectangle 20"/>
+          <p:cNvPr id="22" name="Rectangle 21"/>
           <p:cNvSpPr/>
           <p:nvPr/>
         </p:nvSpPr>
         <p:spPr>
           <a:xfrm>
-            <a:off x="0" y="9810750"/>
+            <a:off x="0" y="11144250"/>
             <a:ext cx="10287000" cy="38100"/>
           </a:xfrm>
           <a:prstGeom prst="rect">
@@ -9897,13 +10273,13 @@
       </p:sp>
       <p:sp>
         <p:nvSpPr>
-          <p:cNvPr id="22" name="TextBox 21"/>
+          <p:cNvPr id="23" name="TextBox 22"/>
           <p:cNvSpPr txBox="1"/>
           <p:nvPr/>
         </p:nvSpPr>
         <p:spPr>
           <a:xfrm>
-            <a:off x="762000" y="7905750"/>
+            <a:off x="762000" y="9191625"/>
             <a:ext cx="8572500" cy="1047750"/>
           </a:xfrm>
           <a:prstGeom prst="rect">
@@ -9936,13 +10312,13 @@
       </p:sp>
       <p:sp>
         <p:nvSpPr>
-          <p:cNvPr id="23" name="TextBox 22"/>
+          <p:cNvPr id="24" name="TextBox 23"/>
           <p:cNvSpPr txBox="1"/>
           <p:nvPr/>
         </p:nvSpPr>
         <p:spPr>
           <a:xfrm>
-            <a:off x="762000" y="8905875"/>
+            <a:off x="762000" y="10191750"/>
             <a:ext cx="8572500" cy="666750"/>
           </a:xfrm>
           <a:prstGeom prst="rect">
@@ -9969,6 +10345,45 @@
                 <a:latin typeface="Source Sans 3"/>
               </a:rPr>
               <a:t>ADVANCED PROGRAMS</a:t>
+            </a:r>
+          </a:p>
+        </p:txBody>
+      </p:sp>
+      <p:sp>
+        <p:nvSpPr>
+          <p:cNvPr id="25" name="TextBox 24"/>
+          <p:cNvSpPr txBox="1"/>
+          <p:nvPr/>
+        </p:nvSpPr>
+        <p:spPr>
+          <a:xfrm>
+            <a:off x="762000" y="11763375"/>
+            <a:ext cx="8763000" cy="476250"/>
+          </a:xfrm>
+          <a:prstGeom prst="rect">
+            <a:avLst/>
+          </a:prstGeom>
+          <a:noFill/>
+        </p:spPr>
+        <p:txBody>
+          <a:bodyPr wrap="square" lIns="0" rIns="0" tIns="0" bIns="0" anchor="t">
+            <a:spAutoFit/>
+          </a:bodyPr>
+          <a:lstStyle/>
+          <a:p>
+            <a:pPr algn="l">
+              <a:lnSpc>
+                <a:spcPct val="120000"/>
+              </a:lnSpc>
+            </a:pPr>
+            <a:r>
+              <a:rPr sz="3000" b="0" i="0">
+                <a:solidFill>
+                  <a:srgbClr val="F4F1EA"/>
+                </a:solidFill>
+                <a:latin typeface="Source Sans 3"/>
+              </a:rPr>
+              <a:t>@soilfoodwebschool</a:t>
             </a:r>
           </a:p>
         </p:txBody>

--- a/templates/posts/october/2026-10-05-mon-ig-teachers-day-banner-cards-alt.pptx
+++ b/templates/posts/october/2026-10-05-mon-ig-teachers-day-banner-cards-alt.pptx
@@ -3802,7 +3802,7 @@
       <p:grpSpPr/>
       <p:pic>
         <p:nvPicPr>
-          <p:cNvPr id="2" name="Picture 1" descr="4276041248470525378.jpg"/>
+          <p:cNvPr id="2" name="Picture 1" descr="1010799069374143544.jpg"/>
           <p:cNvPicPr>
             <a:picLocks noChangeAspect="1"/>
           </p:cNvPicPr>
@@ -4497,11 +4497,11 @@
         <p:spPr>
           <a:xfrm>
             <a:off x="-571500" y="-571500"/>
-            <a:ext cx="4381500" cy="2476500"/>
+            <a:ext cx="3810000" cy="2286000"/>
           </a:xfrm>
           <a:prstGeom prst="roundRect">
             <a:avLst>
-              <a:gd name="adj" fmla="val 15384"/>
+              <a:gd name="adj" fmla="val 16666"/>
             </a:avLst>
           </a:prstGeom>
           <a:solidFill>
@@ -4536,219 +4536,33 @@
           </a:p>
         </p:txBody>
       </p:sp>
-      <p:sp>
-        <p:nvSpPr>
-          <p:cNvPr id="12" name="Oval 11"/>
-          <p:cNvSpPr/>
+      <p:pic>
+        <p:nvPicPr>
+          <p:cNvPr id="12" name="Picture 11" descr="foundation-logo-white.png"/>
+          <p:cNvPicPr>
+            <a:picLocks noChangeAspect="1"/>
+          </p:cNvPicPr>
           <p:nvPr/>
-        </p:nvSpPr>
-        <p:spPr>
-          <a:xfrm>
-            <a:off x="571500" y="476250"/>
-            <a:ext cx="952500" cy="952500"/>
-          </a:xfrm>
-          <a:prstGeom prst="ellipse">
-            <a:avLst/>
-          </a:prstGeom>
-          <a:noFill/>
-          <a:ln w="19050">
-            <a:solidFill>
-              <a:srgbClr val="F4F1EA"/>
-            </a:solidFill>
-          </a:ln>
-          <a:effectLst/>
-        </p:spPr>
-        <p:style>
-          <a:lnRef idx="1">
-            <a:schemeClr val="accent1"/>
-          </a:lnRef>
-          <a:fillRef idx="3">
-            <a:schemeClr val="accent1"/>
-          </a:fillRef>
-          <a:effectRef idx="2">
-            <a:schemeClr val="accent1"/>
-          </a:effectRef>
-          <a:fontRef idx="minor">
-            <a:schemeClr val="lt1"/>
-          </a:fontRef>
-        </p:style>
-        <p:txBody>
-          <a:bodyPr rtlCol="0" anchor="ctr"/>
-          <a:lstStyle/>
-          <a:p>
-            <a:pPr algn="ctr"/>
-          </a:p>
-        </p:txBody>
-      </p:sp>
-      <p:sp>
-        <p:nvSpPr>
-          <p:cNvPr id="13" name="TextBox 12"/>
-          <p:cNvSpPr txBox="1"/>
-          <p:nvPr/>
-        </p:nvSpPr>
-        <p:spPr>
-          <a:xfrm>
-            <a:off x="571500" y="476250"/>
-            <a:ext cx="952500" cy="952500"/>
+        </p:nvPicPr>
+        <p:blipFill>
+          <a:blip r:embed="rId4"/>
+          <a:stretch>
+            <a:fillRect/>
+          </a:stretch>
+        </p:blipFill>
+        <p:spPr>
+          <a:xfrm>
+            <a:off x="476250" y="381000"/>
+            <a:ext cx="1165386" cy="1047750"/>
           </a:xfrm>
           <a:prstGeom prst="rect">
             <a:avLst/>
           </a:prstGeom>
-          <a:noFill/>
-        </p:spPr>
-        <p:txBody>
-          <a:bodyPr wrap="square" lIns="0" rIns="0" tIns="0" bIns="0" anchor="ctr">
-            <a:spAutoFit/>
-          </a:bodyPr>
-          <a:lstStyle/>
-          <a:p>
-            <a:pPr algn="ctr">
-              <a:lnSpc>
-                <a:spcPct val="120000"/>
-              </a:lnSpc>
-            </a:pPr>
-            <a:r>
-              <a:rPr sz="1800" b="1" i="0">
-                <a:solidFill>
-                  <a:srgbClr val="F4F1EA"/>
-                </a:solidFill>
-                <a:latin typeface="Montserrat"/>
-              </a:rPr>
-              <a:t>LOGO</a:t>
-            </a:r>
-          </a:p>
-        </p:txBody>
-      </p:sp>
-      <p:sp>
-        <p:nvSpPr>
-          <p:cNvPr id="14" name="Rectangle 13"/>
-          <p:cNvSpPr/>
-          <p:nvPr/>
-        </p:nvSpPr>
-        <p:spPr>
-          <a:xfrm>
-            <a:off x="1809750" y="523875"/>
-            <a:ext cx="19050" cy="857250"/>
-          </a:xfrm>
-          <a:prstGeom prst="rect">
-            <a:avLst/>
-          </a:prstGeom>
-          <a:solidFill>
-            <a:srgbClr val="F4F1EA"/>
-          </a:solidFill>
-          <a:ln>
-            <a:noFill/>
-          </a:ln>
-          <a:effectLst/>
-        </p:spPr>
-        <p:style>
-          <a:lnRef idx="1">
-            <a:schemeClr val="accent1"/>
-          </a:lnRef>
-          <a:fillRef idx="3">
-            <a:schemeClr val="accent1"/>
-          </a:fillRef>
-          <a:effectRef idx="2">
-            <a:schemeClr val="accent1"/>
-          </a:effectRef>
-          <a:fontRef idx="minor">
-            <a:schemeClr val="lt1"/>
-          </a:fontRef>
-        </p:style>
-        <p:txBody>
-          <a:bodyPr rtlCol="0" anchor="ctr"/>
-          <a:lstStyle/>
-          <a:p>
-            <a:pPr algn="ctr"/>
-          </a:p>
-        </p:txBody>
-      </p:sp>
-      <p:sp>
-        <p:nvSpPr>
-          <p:cNvPr id="15" name="Oval 14"/>
-          <p:cNvSpPr/>
-          <p:nvPr/>
-        </p:nvSpPr>
-        <p:spPr>
-          <a:xfrm>
-            <a:off x="2190750" y="476250"/>
-            <a:ext cx="952500" cy="952500"/>
-          </a:xfrm>
-          <a:prstGeom prst="ellipse">
-            <a:avLst/>
-          </a:prstGeom>
-          <a:noFill/>
-          <a:ln w="19050">
-            <a:solidFill>
-              <a:srgbClr val="F4F1EA"/>
-            </a:solidFill>
-          </a:ln>
-          <a:effectLst/>
-        </p:spPr>
-        <p:style>
-          <a:lnRef idx="1">
-            <a:schemeClr val="accent1"/>
-          </a:lnRef>
-          <a:fillRef idx="3">
-            <a:schemeClr val="accent1"/>
-          </a:fillRef>
-          <a:effectRef idx="2">
-            <a:schemeClr val="accent1"/>
-          </a:effectRef>
-          <a:fontRef idx="minor">
-            <a:schemeClr val="lt1"/>
-          </a:fontRef>
-        </p:style>
-        <p:txBody>
-          <a:bodyPr rtlCol="0" anchor="ctr"/>
-          <a:lstStyle/>
-          <a:p>
-            <a:pPr algn="ctr"/>
-          </a:p>
-        </p:txBody>
-      </p:sp>
-      <p:sp>
-        <p:nvSpPr>
-          <p:cNvPr id="16" name="TextBox 15"/>
-          <p:cNvSpPr txBox="1"/>
-          <p:nvPr/>
-        </p:nvSpPr>
-        <p:spPr>
-          <a:xfrm>
-            <a:off x="2190750" y="476250"/>
-            <a:ext cx="952500" cy="952500"/>
-          </a:xfrm>
-          <a:prstGeom prst="rect">
-            <a:avLst/>
-          </a:prstGeom>
-          <a:noFill/>
-        </p:spPr>
-        <p:txBody>
-          <a:bodyPr wrap="square" lIns="0" rIns="0" tIns="0" bIns="0" anchor="ctr">
-            <a:spAutoFit/>
-          </a:bodyPr>
-          <a:lstStyle/>
-          <a:p>
-            <a:pPr algn="ctr">
-              <a:lnSpc>
-                <a:spcPct val="120000"/>
-              </a:lnSpc>
-            </a:pPr>
-            <a:r>
-              <a:rPr sz="1800" b="1" i="0">
-                <a:solidFill>
-                  <a:srgbClr val="F4F1EA"/>
-                </a:solidFill>
-                <a:latin typeface="Montserrat"/>
-              </a:rPr>
-              <a:t>LOGO</a:t>
-            </a:r>
-          </a:p>
-        </p:txBody>
-      </p:sp>
-      <p:sp>
-        <p:nvSpPr>
-          <p:cNvPr id="17" name="Rectangle 16"/>
+        </p:spPr>
+      </p:pic>
+      <p:sp>
+        <p:nvSpPr>
+          <p:cNvPr id="13" name="Rectangle 12"/>
           <p:cNvSpPr/>
           <p:nvPr/>
         </p:nvSpPr>
@@ -4792,7 +4606,7 @@
       </p:sp>
       <p:sp>
         <p:nvSpPr>
-          <p:cNvPr id="18" name="Rectangle 17"/>
+          <p:cNvPr id="14" name="Rectangle 13"/>
           <p:cNvSpPr/>
           <p:nvPr/>
         </p:nvSpPr>
@@ -4838,7 +4652,7 @@
       </p:sp>
       <p:sp>
         <p:nvSpPr>
-          <p:cNvPr id="19" name="Rectangle 18"/>
+          <p:cNvPr id="15" name="Rectangle 14"/>
           <p:cNvSpPr/>
           <p:nvPr/>
         </p:nvSpPr>
@@ -4882,7 +4696,7 @@
       </p:sp>
       <p:sp>
         <p:nvSpPr>
-          <p:cNvPr id="20" name="Rectangle 19"/>
+          <p:cNvPr id="16" name="Rectangle 15"/>
           <p:cNvSpPr/>
           <p:nvPr/>
         </p:nvSpPr>
@@ -4926,7 +4740,7 @@
       </p:sp>
       <p:sp>
         <p:nvSpPr>
-          <p:cNvPr id="21" name="Rectangle 20"/>
+          <p:cNvPr id="17" name="Rectangle 16"/>
           <p:cNvSpPr/>
           <p:nvPr/>
         </p:nvSpPr>
@@ -4970,7 +4784,7 @@
       </p:sp>
       <p:sp>
         <p:nvSpPr>
-          <p:cNvPr id="22" name="TextBox 21"/>
+          <p:cNvPr id="18" name="TextBox 17"/>
           <p:cNvSpPr txBox="1"/>
           <p:nvPr/>
         </p:nvSpPr>
@@ -5009,7 +4823,7 @@
       </p:sp>
       <p:sp>
         <p:nvSpPr>
-          <p:cNvPr id="23" name="TextBox 22"/>
+          <p:cNvPr id="19" name="TextBox 18"/>
           <p:cNvSpPr txBox="1"/>
           <p:nvPr/>
         </p:nvSpPr>
@@ -5048,7 +4862,7 @@
       </p:sp>
       <p:sp>
         <p:nvSpPr>
-          <p:cNvPr id="24" name="TextBox 23"/>
+          <p:cNvPr id="20" name="TextBox 19"/>
           <p:cNvSpPr txBox="1"/>
           <p:nvPr/>
         </p:nvSpPr>
@@ -5113,7 +4927,7 @@
       <p:grpSpPr/>
       <p:pic>
         <p:nvPicPr>
-          <p:cNvPr id="2" name="Picture 1" descr="5080328754071181355.jpg"/>
+          <p:cNvPr id="2" name="Picture 1" descr="378979091444184200.jpg"/>
           <p:cNvPicPr>
             <a:picLocks noChangeAspect="1"/>
           </p:cNvPicPr>
@@ -5808,11 +5622,11 @@
         <p:spPr>
           <a:xfrm>
             <a:off x="-571500" y="-571500"/>
-            <a:ext cx="4381500" cy="2476500"/>
+            <a:ext cx="3810000" cy="2286000"/>
           </a:xfrm>
           <a:prstGeom prst="roundRect">
             <a:avLst>
-              <a:gd name="adj" fmla="val 15384"/>
+              <a:gd name="adj" fmla="val 16666"/>
             </a:avLst>
           </a:prstGeom>
           <a:solidFill>
@@ -5847,219 +5661,33 @@
           </a:p>
         </p:txBody>
       </p:sp>
-      <p:sp>
-        <p:nvSpPr>
-          <p:cNvPr id="12" name="Oval 11"/>
-          <p:cNvSpPr/>
+      <p:pic>
+        <p:nvPicPr>
+          <p:cNvPr id="12" name="Picture 11" descr="foundation-logo-white.png"/>
+          <p:cNvPicPr>
+            <a:picLocks noChangeAspect="1"/>
+          </p:cNvPicPr>
           <p:nvPr/>
-        </p:nvSpPr>
-        <p:spPr>
-          <a:xfrm>
-            <a:off x="571500" y="476250"/>
-            <a:ext cx="952500" cy="952500"/>
-          </a:xfrm>
-          <a:prstGeom prst="ellipse">
-            <a:avLst/>
-          </a:prstGeom>
-          <a:noFill/>
-          <a:ln w="19050">
-            <a:solidFill>
-              <a:srgbClr val="F4F1EA"/>
-            </a:solidFill>
-          </a:ln>
-          <a:effectLst/>
-        </p:spPr>
-        <p:style>
-          <a:lnRef idx="1">
-            <a:schemeClr val="accent1"/>
-          </a:lnRef>
-          <a:fillRef idx="3">
-            <a:schemeClr val="accent1"/>
-          </a:fillRef>
-          <a:effectRef idx="2">
-            <a:schemeClr val="accent1"/>
-          </a:effectRef>
-          <a:fontRef idx="minor">
-            <a:schemeClr val="lt1"/>
-          </a:fontRef>
-        </p:style>
-        <p:txBody>
-          <a:bodyPr rtlCol="0" anchor="ctr"/>
-          <a:lstStyle/>
-          <a:p>
-            <a:pPr algn="ctr"/>
-          </a:p>
-        </p:txBody>
-      </p:sp>
-      <p:sp>
-        <p:nvSpPr>
-          <p:cNvPr id="13" name="TextBox 12"/>
-          <p:cNvSpPr txBox="1"/>
-          <p:nvPr/>
-        </p:nvSpPr>
-        <p:spPr>
-          <a:xfrm>
-            <a:off x="571500" y="476250"/>
-            <a:ext cx="952500" cy="952500"/>
+        </p:nvPicPr>
+        <p:blipFill>
+          <a:blip r:embed="rId4"/>
+          <a:stretch>
+            <a:fillRect/>
+          </a:stretch>
+        </p:blipFill>
+        <p:spPr>
+          <a:xfrm>
+            <a:off x="476250" y="381000"/>
+            <a:ext cx="1165386" cy="1047750"/>
           </a:xfrm>
           <a:prstGeom prst="rect">
             <a:avLst/>
           </a:prstGeom>
-          <a:noFill/>
-        </p:spPr>
-        <p:txBody>
-          <a:bodyPr wrap="square" lIns="0" rIns="0" tIns="0" bIns="0" anchor="ctr">
-            <a:spAutoFit/>
-          </a:bodyPr>
-          <a:lstStyle/>
-          <a:p>
-            <a:pPr algn="ctr">
-              <a:lnSpc>
-                <a:spcPct val="120000"/>
-              </a:lnSpc>
-            </a:pPr>
-            <a:r>
-              <a:rPr sz="1800" b="1" i="0">
-                <a:solidFill>
-                  <a:srgbClr val="F4F1EA"/>
-                </a:solidFill>
-                <a:latin typeface="Montserrat"/>
-              </a:rPr>
-              <a:t>LOGO</a:t>
-            </a:r>
-          </a:p>
-        </p:txBody>
-      </p:sp>
-      <p:sp>
-        <p:nvSpPr>
-          <p:cNvPr id="14" name="Rectangle 13"/>
-          <p:cNvSpPr/>
-          <p:nvPr/>
-        </p:nvSpPr>
-        <p:spPr>
-          <a:xfrm>
-            <a:off x="1809750" y="523875"/>
-            <a:ext cx="19050" cy="857250"/>
-          </a:xfrm>
-          <a:prstGeom prst="rect">
-            <a:avLst/>
-          </a:prstGeom>
-          <a:solidFill>
-            <a:srgbClr val="F4F1EA"/>
-          </a:solidFill>
-          <a:ln>
-            <a:noFill/>
-          </a:ln>
-          <a:effectLst/>
-        </p:spPr>
-        <p:style>
-          <a:lnRef idx="1">
-            <a:schemeClr val="accent1"/>
-          </a:lnRef>
-          <a:fillRef idx="3">
-            <a:schemeClr val="accent1"/>
-          </a:fillRef>
-          <a:effectRef idx="2">
-            <a:schemeClr val="accent1"/>
-          </a:effectRef>
-          <a:fontRef idx="minor">
-            <a:schemeClr val="lt1"/>
-          </a:fontRef>
-        </p:style>
-        <p:txBody>
-          <a:bodyPr rtlCol="0" anchor="ctr"/>
-          <a:lstStyle/>
-          <a:p>
-            <a:pPr algn="ctr"/>
-          </a:p>
-        </p:txBody>
-      </p:sp>
-      <p:sp>
-        <p:nvSpPr>
-          <p:cNvPr id="15" name="Oval 14"/>
-          <p:cNvSpPr/>
-          <p:nvPr/>
-        </p:nvSpPr>
-        <p:spPr>
-          <a:xfrm>
-            <a:off x="2190750" y="476250"/>
-            <a:ext cx="952500" cy="952500"/>
-          </a:xfrm>
-          <a:prstGeom prst="ellipse">
-            <a:avLst/>
-          </a:prstGeom>
-          <a:noFill/>
-          <a:ln w="19050">
-            <a:solidFill>
-              <a:srgbClr val="F4F1EA"/>
-            </a:solidFill>
-          </a:ln>
-          <a:effectLst/>
-        </p:spPr>
-        <p:style>
-          <a:lnRef idx="1">
-            <a:schemeClr val="accent1"/>
-          </a:lnRef>
-          <a:fillRef idx="3">
-            <a:schemeClr val="accent1"/>
-          </a:fillRef>
-          <a:effectRef idx="2">
-            <a:schemeClr val="accent1"/>
-          </a:effectRef>
-          <a:fontRef idx="minor">
-            <a:schemeClr val="lt1"/>
-          </a:fontRef>
-        </p:style>
-        <p:txBody>
-          <a:bodyPr rtlCol="0" anchor="ctr"/>
-          <a:lstStyle/>
-          <a:p>
-            <a:pPr algn="ctr"/>
-          </a:p>
-        </p:txBody>
-      </p:sp>
-      <p:sp>
-        <p:nvSpPr>
-          <p:cNvPr id="16" name="TextBox 15"/>
-          <p:cNvSpPr txBox="1"/>
-          <p:nvPr/>
-        </p:nvSpPr>
-        <p:spPr>
-          <a:xfrm>
-            <a:off x="2190750" y="476250"/>
-            <a:ext cx="952500" cy="952500"/>
-          </a:xfrm>
-          <a:prstGeom prst="rect">
-            <a:avLst/>
-          </a:prstGeom>
-          <a:noFill/>
-        </p:spPr>
-        <p:txBody>
-          <a:bodyPr wrap="square" lIns="0" rIns="0" tIns="0" bIns="0" anchor="ctr">
-            <a:spAutoFit/>
-          </a:bodyPr>
-          <a:lstStyle/>
-          <a:p>
-            <a:pPr algn="ctr">
-              <a:lnSpc>
-                <a:spcPct val="120000"/>
-              </a:lnSpc>
-            </a:pPr>
-            <a:r>
-              <a:rPr sz="1800" b="1" i="0">
-                <a:solidFill>
-                  <a:srgbClr val="F4F1EA"/>
-                </a:solidFill>
-                <a:latin typeface="Montserrat"/>
-              </a:rPr>
-              <a:t>LOGO</a:t>
-            </a:r>
-          </a:p>
-        </p:txBody>
-      </p:sp>
-      <p:sp>
-        <p:nvSpPr>
-          <p:cNvPr id="17" name="Rectangle 16"/>
+        </p:spPr>
+      </p:pic>
+      <p:sp>
+        <p:nvSpPr>
+          <p:cNvPr id="13" name="Rectangle 12"/>
           <p:cNvSpPr/>
           <p:nvPr/>
         </p:nvSpPr>
@@ -6103,7 +5731,7 @@
       </p:sp>
       <p:sp>
         <p:nvSpPr>
-          <p:cNvPr id="18" name="Rectangle 17"/>
+          <p:cNvPr id="14" name="Rectangle 13"/>
           <p:cNvSpPr/>
           <p:nvPr/>
         </p:nvSpPr>
@@ -6149,7 +5777,7 @@
       </p:sp>
       <p:sp>
         <p:nvSpPr>
-          <p:cNvPr id="19" name="Rectangle 18"/>
+          <p:cNvPr id="15" name="Rectangle 14"/>
           <p:cNvSpPr/>
           <p:nvPr/>
         </p:nvSpPr>
@@ -6193,7 +5821,7 @@
       </p:sp>
       <p:sp>
         <p:nvSpPr>
-          <p:cNvPr id="20" name="Rectangle 19"/>
+          <p:cNvPr id="16" name="Rectangle 15"/>
           <p:cNvSpPr/>
           <p:nvPr/>
         </p:nvSpPr>
@@ -6237,7 +5865,7 @@
       </p:sp>
       <p:sp>
         <p:nvSpPr>
-          <p:cNvPr id="21" name="Rectangle 20"/>
+          <p:cNvPr id="17" name="Rectangle 16"/>
           <p:cNvSpPr/>
           <p:nvPr/>
         </p:nvSpPr>
@@ -6281,7 +5909,7 @@
       </p:sp>
       <p:sp>
         <p:nvSpPr>
-          <p:cNvPr id="22" name="TextBox 21"/>
+          <p:cNvPr id="18" name="TextBox 17"/>
           <p:cNvSpPr txBox="1"/>
           <p:nvPr/>
         </p:nvSpPr>
@@ -6320,7 +5948,7 @@
       </p:sp>
       <p:sp>
         <p:nvSpPr>
-          <p:cNvPr id="23" name="TextBox 22"/>
+          <p:cNvPr id="19" name="TextBox 18"/>
           <p:cNvSpPr txBox="1"/>
           <p:nvPr/>
         </p:nvSpPr>
@@ -6359,7 +5987,7 @@
       </p:sp>
       <p:sp>
         <p:nvSpPr>
-          <p:cNvPr id="24" name="TextBox 23"/>
+          <p:cNvPr id="20" name="TextBox 19"/>
           <p:cNvSpPr txBox="1"/>
           <p:nvPr/>
         </p:nvSpPr>
@@ -6424,7 +6052,7 @@
       <p:grpSpPr/>
       <p:pic>
         <p:nvPicPr>
-          <p:cNvPr id="2" name="Picture 1" descr="1186483563729423873.jpg"/>
+          <p:cNvPr id="2" name="Picture 1" descr="5325947196430632003.jpg"/>
           <p:cNvPicPr>
             <a:picLocks noChangeAspect="1"/>
           </p:cNvPicPr>
@@ -7119,11 +6747,11 @@
         <p:spPr>
           <a:xfrm>
             <a:off x="-571500" y="-571500"/>
-            <a:ext cx="4381500" cy="2476500"/>
+            <a:ext cx="3810000" cy="2286000"/>
           </a:xfrm>
           <a:prstGeom prst="roundRect">
             <a:avLst>
-              <a:gd name="adj" fmla="val 15384"/>
+              <a:gd name="adj" fmla="val 16666"/>
             </a:avLst>
           </a:prstGeom>
           <a:solidFill>
@@ -7158,219 +6786,33 @@
           </a:p>
         </p:txBody>
       </p:sp>
-      <p:sp>
-        <p:nvSpPr>
-          <p:cNvPr id="12" name="Oval 11"/>
-          <p:cNvSpPr/>
+      <p:pic>
+        <p:nvPicPr>
+          <p:cNvPr id="12" name="Picture 11" descr="foundation-logo-white.png"/>
+          <p:cNvPicPr>
+            <a:picLocks noChangeAspect="1"/>
+          </p:cNvPicPr>
           <p:nvPr/>
-        </p:nvSpPr>
-        <p:spPr>
-          <a:xfrm>
-            <a:off x="571500" y="476250"/>
-            <a:ext cx="952500" cy="952500"/>
-          </a:xfrm>
-          <a:prstGeom prst="ellipse">
-            <a:avLst/>
-          </a:prstGeom>
-          <a:noFill/>
-          <a:ln w="19050">
-            <a:solidFill>
-              <a:srgbClr val="F4F1EA"/>
-            </a:solidFill>
-          </a:ln>
-          <a:effectLst/>
-        </p:spPr>
-        <p:style>
-          <a:lnRef idx="1">
-            <a:schemeClr val="accent1"/>
-          </a:lnRef>
-          <a:fillRef idx="3">
-            <a:schemeClr val="accent1"/>
-          </a:fillRef>
-          <a:effectRef idx="2">
-            <a:schemeClr val="accent1"/>
-          </a:effectRef>
-          <a:fontRef idx="minor">
-            <a:schemeClr val="lt1"/>
-          </a:fontRef>
-        </p:style>
-        <p:txBody>
-          <a:bodyPr rtlCol="0" anchor="ctr"/>
-          <a:lstStyle/>
-          <a:p>
-            <a:pPr algn="ctr"/>
-          </a:p>
-        </p:txBody>
-      </p:sp>
-      <p:sp>
-        <p:nvSpPr>
-          <p:cNvPr id="13" name="TextBox 12"/>
-          <p:cNvSpPr txBox="1"/>
-          <p:nvPr/>
-        </p:nvSpPr>
-        <p:spPr>
-          <a:xfrm>
-            <a:off x="571500" y="476250"/>
-            <a:ext cx="952500" cy="952500"/>
+        </p:nvPicPr>
+        <p:blipFill>
+          <a:blip r:embed="rId4"/>
+          <a:stretch>
+            <a:fillRect/>
+          </a:stretch>
+        </p:blipFill>
+        <p:spPr>
+          <a:xfrm>
+            <a:off x="476250" y="381000"/>
+            <a:ext cx="1165386" cy="1047750"/>
           </a:xfrm>
           <a:prstGeom prst="rect">
             <a:avLst/>
           </a:prstGeom>
-          <a:noFill/>
-        </p:spPr>
-        <p:txBody>
-          <a:bodyPr wrap="square" lIns="0" rIns="0" tIns="0" bIns="0" anchor="ctr">
-            <a:spAutoFit/>
-          </a:bodyPr>
-          <a:lstStyle/>
-          <a:p>
-            <a:pPr algn="ctr">
-              <a:lnSpc>
-                <a:spcPct val="120000"/>
-              </a:lnSpc>
-            </a:pPr>
-            <a:r>
-              <a:rPr sz="1800" b="1" i="0">
-                <a:solidFill>
-                  <a:srgbClr val="F4F1EA"/>
-                </a:solidFill>
-                <a:latin typeface="Montserrat"/>
-              </a:rPr>
-              <a:t>LOGO</a:t>
-            </a:r>
-          </a:p>
-        </p:txBody>
-      </p:sp>
-      <p:sp>
-        <p:nvSpPr>
-          <p:cNvPr id="14" name="Rectangle 13"/>
-          <p:cNvSpPr/>
-          <p:nvPr/>
-        </p:nvSpPr>
-        <p:spPr>
-          <a:xfrm>
-            <a:off x="1809750" y="523875"/>
-            <a:ext cx="19050" cy="857250"/>
-          </a:xfrm>
-          <a:prstGeom prst="rect">
-            <a:avLst/>
-          </a:prstGeom>
-          <a:solidFill>
-            <a:srgbClr val="F4F1EA"/>
-          </a:solidFill>
-          <a:ln>
-            <a:noFill/>
-          </a:ln>
-          <a:effectLst/>
-        </p:spPr>
-        <p:style>
-          <a:lnRef idx="1">
-            <a:schemeClr val="accent1"/>
-          </a:lnRef>
-          <a:fillRef idx="3">
-            <a:schemeClr val="accent1"/>
-          </a:fillRef>
-          <a:effectRef idx="2">
-            <a:schemeClr val="accent1"/>
-          </a:effectRef>
-          <a:fontRef idx="minor">
-            <a:schemeClr val="lt1"/>
-          </a:fontRef>
-        </p:style>
-        <p:txBody>
-          <a:bodyPr rtlCol="0" anchor="ctr"/>
-          <a:lstStyle/>
-          <a:p>
-            <a:pPr algn="ctr"/>
-          </a:p>
-        </p:txBody>
-      </p:sp>
-      <p:sp>
-        <p:nvSpPr>
-          <p:cNvPr id="15" name="Oval 14"/>
-          <p:cNvSpPr/>
-          <p:nvPr/>
-        </p:nvSpPr>
-        <p:spPr>
-          <a:xfrm>
-            <a:off x="2190750" y="476250"/>
-            <a:ext cx="952500" cy="952500"/>
-          </a:xfrm>
-          <a:prstGeom prst="ellipse">
-            <a:avLst/>
-          </a:prstGeom>
-          <a:noFill/>
-          <a:ln w="19050">
-            <a:solidFill>
-              <a:srgbClr val="F4F1EA"/>
-            </a:solidFill>
-          </a:ln>
-          <a:effectLst/>
-        </p:spPr>
-        <p:style>
-          <a:lnRef idx="1">
-            <a:schemeClr val="accent1"/>
-          </a:lnRef>
-          <a:fillRef idx="3">
-            <a:schemeClr val="accent1"/>
-          </a:fillRef>
-          <a:effectRef idx="2">
-            <a:schemeClr val="accent1"/>
-          </a:effectRef>
-          <a:fontRef idx="minor">
-            <a:schemeClr val="lt1"/>
-          </a:fontRef>
-        </p:style>
-        <p:txBody>
-          <a:bodyPr rtlCol="0" anchor="ctr"/>
-          <a:lstStyle/>
-          <a:p>
-            <a:pPr algn="ctr"/>
-          </a:p>
-        </p:txBody>
-      </p:sp>
-      <p:sp>
-        <p:nvSpPr>
-          <p:cNvPr id="16" name="TextBox 15"/>
-          <p:cNvSpPr txBox="1"/>
-          <p:nvPr/>
-        </p:nvSpPr>
-        <p:spPr>
-          <a:xfrm>
-            <a:off x="2190750" y="476250"/>
-            <a:ext cx="952500" cy="952500"/>
-          </a:xfrm>
-          <a:prstGeom prst="rect">
-            <a:avLst/>
-          </a:prstGeom>
-          <a:noFill/>
-        </p:spPr>
-        <p:txBody>
-          <a:bodyPr wrap="square" lIns="0" rIns="0" tIns="0" bIns="0" anchor="ctr">
-            <a:spAutoFit/>
-          </a:bodyPr>
-          <a:lstStyle/>
-          <a:p>
-            <a:pPr algn="ctr">
-              <a:lnSpc>
-                <a:spcPct val="120000"/>
-              </a:lnSpc>
-            </a:pPr>
-            <a:r>
-              <a:rPr sz="1800" b="1" i="0">
-                <a:solidFill>
-                  <a:srgbClr val="F4F1EA"/>
-                </a:solidFill>
-                <a:latin typeface="Montserrat"/>
-              </a:rPr>
-              <a:t>LOGO</a:t>
-            </a:r>
-          </a:p>
-        </p:txBody>
-      </p:sp>
-      <p:sp>
-        <p:nvSpPr>
-          <p:cNvPr id="17" name="Rectangle 16"/>
+        </p:spPr>
+      </p:pic>
+      <p:sp>
+        <p:nvSpPr>
+          <p:cNvPr id="13" name="Rectangle 12"/>
           <p:cNvSpPr/>
           <p:nvPr/>
         </p:nvSpPr>
@@ -7414,7 +6856,7 @@
       </p:sp>
       <p:sp>
         <p:nvSpPr>
-          <p:cNvPr id="18" name="Rectangle 17"/>
+          <p:cNvPr id="14" name="Rectangle 13"/>
           <p:cNvSpPr/>
           <p:nvPr/>
         </p:nvSpPr>
@@ -7460,7 +6902,7 @@
       </p:sp>
       <p:sp>
         <p:nvSpPr>
-          <p:cNvPr id="19" name="Rectangle 18"/>
+          <p:cNvPr id="15" name="Rectangle 14"/>
           <p:cNvSpPr/>
           <p:nvPr/>
         </p:nvSpPr>
@@ -7504,7 +6946,7 @@
       </p:sp>
       <p:sp>
         <p:nvSpPr>
-          <p:cNvPr id="20" name="Rectangle 19"/>
+          <p:cNvPr id="16" name="Rectangle 15"/>
           <p:cNvSpPr/>
           <p:nvPr/>
         </p:nvSpPr>
@@ -7548,7 +6990,7 @@
       </p:sp>
       <p:sp>
         <p:nvSpPr>
-          <p:cNvPr id="21" name="Rectangle 20"/>
+          <p:cNvPr id="17" name="Rectangle 16"/>
           <p:cNvSpPr/>
           <p:nvPr/>
         </p:nvSpPr>
@@ -7592,7 +7034,7 @@
       </p:sp>
       <p:sp>
         <p:nvSpPr>
-          <p:cNvPr id="22" name="TextBox 21"/>
+          <p:cNvPr id="18" name="TextBox 17"/>
           <p:cNvSpPr txBox="1"/>
           <p:nvPr/>
         </p:nvSpPr>
@@ -7631,7 +7073,7 @@
       </p:sp>
       <p:sp>
         <p:nvSpPr>
-          <p:cNvPr id="23" name="TextBox 22"/>
+          <p:cNvPr id="19" name="TextBox 18"/>
           <p:cNvSpPr txBox="1"/>
           <p:nvPr/>
         </p:nvSpPr>
@@ -7670,7 +7112,7 @@
       </p:sp>
       <p:sp>
         <p:nvSpPr>
-          <p:cNvPr id="24" name="TextBox 23"/>
+          <p:cNvPr id="20" name="TextBox 19"/>
           <p:cNvSpPr txBox="1"/>
           <p:nvPr/>
         </p:nvSpPr>
@@ -7735,7 +7177,7 @@
       <p:grpSpPr/>
       <p:pic>
         <p:nvPicPr>
-          <p:cNvPr id="2" name="Picture 1" descr="5390912766246518019.jpg"/>
+          <p:cNvPr id="2" name="Picture 1" descr="754003833889730245.jpg"/>
           <p:cNvPicPr>
             <a:picLocks noChangeAspect="1"/>
           </p:cNvPicPr>
@@ -8430,11 +7872,11 @@
         <p:spPr>
           <a:xfrm>
             <a:off x="-571500" y="-571500"/>
-            <a:ext cx="4381500" cy="2476500"/>
+            <a:ext cx="3810000" cy="2286000"/>
           </a:xfrm>
           <a:prstGeom prst="roundRect">
             <a:avLst>
-              <a:gd name="adj" fmla="val 15384"/>
+              <a:gd name="adj" fmla="val 16666"/>
             </a:avLst>
           </a:prstGeom>
           <a:solidFill>
@@ -8469,219 +7911,33 @@
           </a:p>
         </p:txBody>
       </p:sp>
-      <p:sp>
-        <p:nvSpPr>
-          <p:cNvPr id="12" name="Oval 11"/>
-          <p:cNvSpPr/>
+      <p:pic>
+        <p:nvPicPr>
+          <p:cNvPr id="12" name="Picture 11" descr="foundation-logo-white.png"/>
+          <p:cNvPicPr>
+            <a:picLocks noChangeAspect="1"/>
+          </p:cNvPicPr>
           <p:nvPr/>
-        </p:nvSpPr>
-        <p:spPr>
-          <a:xfrm>
-            <a:off x="571500" y="476250"/>
-            <a:ext cx="952500" cy="952500"/>
-          </a:xfrm>
-          <a:prstGeom prst="ellipse">
-            <a:avLst/>
-          </a:prstGeom>
-          <a:noFill/>
-          <a:ln w="19050">
-            <a:solidFill>
-              <a:srgbClr val="F4F1EA"/>
-            </a:solidFill>
-          </a:ln>
-          <a:effectLst/>
-        </p:spPr>
-        <p:style>
-          <a:lnRef idx="1">
-            <a:schemeClr val="accent1"/>
-          </a:lnRef>
-          <a:fillRef idx="3">
-            <a:schemeClr val="accent1"/>
-          </a:fillRef>
-          <a:effectRef idx="2">
-            <a:schemeClr val="accent1"/>
-          </a:effectRef>
-          <a:fontRef idx="minor">
-            <a:schemeClr val="lt1"/>
-          </a:fontRef>
-        </p:style>
-        <p:txBody>
-          <a:bodyPr rtlCol="0" anchor="ctr"/>
-          <a:lstStyle/>
-          <a:p>
-            <a:pPr algn="ctr"/>
-          </a:p>
-        </p:txBody>
-      </p:sp>
-      <p:sp>
-        <p:nvSpPr>
-          <p:cNvPr id="13" name="TextBox 12"/>
-          <p:cNvSpPr txBox="1"/>
-          <p:nvPr/>
-        </p:nvSpPr>
-        <p:spPr>
-          <a:xfrm>
-            <a:off x="571500" y="476250"/>
-            <a:ext cx="952500" cy="952500"/>
+        </p:nvPicPr>
+        <p:blipFill>
+          <a:blip r:embed="rId4"/>
+          <a:stretch>
+            <a:fillRect/>
+          </a:stretch>
+        </p:blipFill>
+        <p:spPr>
+          <a:xfrm>
+            <a:off x="476250" y="381000"/>
+            <a:ext cx="1165386" cy="1047750"/>
           </a:xfrm>
           <a:prstGeom prst="rect">
             <a:avLst/>
           </a:prstGeom>
-          <a:noFill/>
-        </p:spPr>
-        <p:txBody>
-          <a:bodyPr wrap="square" lIns="0" rIns="0" tIns="0" bIns="0" anchor="ctr">
-            <a:spAutoFit/>
-          </a:bodyPr>
-          <a:lstStyle/>
-          <a:p>
-            <a:pPr algn="ctr">
-              <a:lnSpc>
-                <a:spcPct val="120000"/>
-              </a:lnSpc>
-            </a:pPr>
-            <a:r>
-              <a:rPr sz="1800" b="1" i="0">
-                <a:solidFill>
-                  <a:srgbClr val="F4F1EA"/>
-                </a:solidFill>
-                <a:latin typeface="Montserrat"/>
-              </a:rPr>
-              <a:t>LOGO</a:t>
-            </a:r>
-          </a:p>
-        </p:txBody>
-      </p:sp>
-      <p:sp>
-        <p:nvSpPr>
-          <p:cNvPr id="14" name="Rectangle 13"/>
-          <p:cNvSpPr/>
-          <p:nvPr/>
-        </p:nvSpPr>
-        <p:spPr>
-          <a:xfrm>
-            <a:off x="1809750" y="523875"/>
-            <a:ext cx="19050" cy="857250"/>
-          </a:xfrm>
-          <a:prstGeom prst="rect">
-            <a:avLst/>
-          </a:prstGeom>
-          <a:solidFill>
-            <a:srgbClr val="F4F1EA"/>
-          </a:solidFill>
-          <a:ln>
-            <a:noFill/>
-          </a:ln>
-          <a:effectLst/>
-        </p:spPr>
-        <p:style>
-          <a:lnRef idx="1">
-            <a:schemeClr val="accent1"/>
-          </a:lnRef>
-          <a:fillRef idx="3">
-            <a:schemeClr val="accent1"/>
-          </a:fillRef>
-          <a:effectRef idx="2">
-            <a:schemeClr val="accent1"/>
-          </a:effectRef>
-          <a:fontRef idx="minor">
-            <a:schemeClr val="lt1"/>
-          </a:fontRef>
-        </p:style>
-        <p:txBody>
-          <a:bodyPr rtlCol="0" anchor="ctr"/>
-          <a:lstStyle/>
-          <a:p>
-            <a:pPr algn="ctr"/>
-          </a:p>
-        </p:txBody>
-      </p:sp>
-      <p:sp>
-        <p:nvSpPr>
-          <p:cNvPr id="15" name="Oval 14"/>
-          <p:cNvSpPr/>
-          <p:nvPr/>
-        </p:nvSpPr>
-        <p:spPr>
-          <a:xfrm>
-            <a:off x="2190750" y="476250"/>
-            <a:ext cx="952500" cy="952500"/>
-          </a:xfrm>
-          <a:prstGeom prst="ellipse">
-            <a:avLst/>
-          </a:prstGeom>
-          <a:noFill/>
-          <a:ln w="19050">
-            <a:solidFill>
-              <a:srgbClr val="F4F1EA"/>
-            </a:solidFill>
-          </a:ln>
-          <a:effectLst/>
-        </p:spPr>
-        <p:style>
-          <a:lnRef idx="1">
-            <a:schemeClr val="accent1"/>
-          </a:lnRef>
-          <a:fillRef idx="3">
-            <a:schemeClr val="accent1"/>
-          </a:fillRef>
-          <a:effectRef idx="2">
-            <a:schemeClr val="accent1"/>
-          </a:effectRef>
-          <a:fontRef idx="minor">
-            <a:schemeClr val="lt1"/>
-          </a:fontRef>
-        </p:style>
-        <p:txBody>
-          <a:bodyPr rtlCol="0" anchor="ctr"/>
-          <a:lstStyle/>
-          <a:p>
-            <a:pPr algn="ctr"/>
-          </a:p>
-        </p:txBody>
-      </p:sp>
-      <p:sp>
-        <p:nvSpPr>
-          <p:cNvPr id="16" name="TextBox 15"/>
-          <p:cNvSpPr txBox="1"/>
-          <p:nvPr/>
-        </p:nvSpPr>
-        <p:spPr>
-          <a:xfrm>
-            <a:off x="2190750" y="476250"/>
-            <a:ext cx="952500" cy="952500"/>
-          </a:xfrm>
-          <a:prstGeom prst="rect">
-            <a:avLst/>
-          </a:prstGeom>
-          <a:noFill/>
-        </p:spPr>
-        <p:txBody>
-          <a:bodyPr wrap="square" lIns="0" rIns="0" tIns="0" bIns="0" anchor="ctr">
-            <a:spAutoFit/>
-          </a:bodyPr>
-          <a:lstStyle/>
-          <a:p>
-            <a:pPr algn="ctr">
-              <a:lnSpc>
-                <a:spcPct val="120000"/>
-              </a:lnSpc>
-            </a:pPr>
-            <a:r>
-              <a:rPr sz="1800" b="1" i="0">
-                <a:solidFill>
-                  <a:srgbClr val="F4F1EA"/>
-                </a:solidFill>
-                <a:latin typeface="Montserrat"/>
-              </a:rPr>
-              <a:t>LOGO</a:t>
-            </a:r>
-          </a:p>
-        </p:txBody>
-      </p:sp>
-      <p:sp>
-        <p:nvSpPr>
-          <p:cNvPr id="17" name="Rectangle 16"/>
+        </p:spPr>
+      </p:pic>
+      <p:sp>
+        <p:nvSpPr>
+          <p:cNvPr id="13" name="Rectangle 12"/>
           <p:cNvSpPr/>
           <p:nvPr/>
         </p:nvSpPr>
@@ -8725,7 +7981,7 @@
       </p:sp>
       <p:sp>
         <p:nvSpPr>
-          <p:cNvPr id="18" name="Rectangle 17"/>
+          <p:cNvPr id="14" name="Rectangle 13"/>
           <p:cNvSpPr/>
           <p:nvPr/>
         </p:nvSpPr>
@@ -8771,7 +8027,7 @@
       </p:sp>
       <p:sp>
         <p:nvSpPr>
-          <p:cNvPr id="19" name="Rectangle 18"/>
+          <p:cNvPr id="15" name="Rectangle 14"/>
           <p:cNvSpPr/>
           <p:nvPr/>
         </p:nvSpPr>
@@ -8815,7 +8071,7 @@
       </p:sp>
       <p:sp>
         <p:nvSpPr>
-          <p:cNvPr id="20" name="Rectangle 19"/>
+          <p:cNvPr id="16" name="Rectangle 15"/>
           <p:cNvSpPr/>
           <p:nvPr/>
         </p:nvSpPr>
@@ -8859,7 +8115,7 @@
       </p:sp>
       <p:sp>
         <p:nvSpPr>
-          <p:cNvPr id="21" name="Rectangle 20"/>
+          <p:cNvPr id="17" name="Rectangle 16"/>
           <p:cNvSpPr/>
           <p:nvPr/>
         </p:nvSpPr>
@@ -8903,7 +8159,7 @@
       </p:sp>
       <p:sp>
         <p:nvSpPr>
-          <p:cNvPr id="22" name="TextBox 21"/>
+          <p:cNvPr id="18" name="TextBox 17"/>
           <p:cNvSpPr txBox="1"/>
           <p:nvPr/>
         </p:nvSpPr>
@@ -8942,7 +8198,7 @@
       </p:sp>
       <p:sp>
         <p:nvSpPr>
-          <p:cNvPr id="23" name="TextBox 22"/>
+          <p:cNvPr id="19" name="TextBox 18"/>
           <p:cNvSpPr txBox="1"/>
           <p:nvPr/>
         </p:nvSpPr>
@@ -8981,7 +8237,7 @@
       </p:sp>
       <p:sp>
         <p:nvSpPr>
-          <p:cNvPr id="24" name="TextBox 23"/>
+          <p:cNvPr id="20" name="TextBox 19"/>
           <p:cNvSpPr txBox="1"/>
           <p:nvPr/>
         </p:nvSpPr>
@@ -9800,11 +9056,11 @@
         <p:spPr>
           <a:xfrm>
             <a:off x="-571500" y="-571500"/>
-            <a:ext cx="4381500" cy="2476500"/>
+            <a:ext cx="3810000" cy="2286000"/>
           </a:xfrm>
           <a:prstGeom prst="roundRect">
             <a:avLst>
-              <a:gd name="adj" fmla="val 15384"/>
+              <a:gd name="adj" fmla="val 16666"/>
             </a:avLst>
           </a:prstGeom>
           <a:solidFill>
@@ -9839,219 +9095,33 @@
           </a:p>
         </p:txBody>
       </p:sp>
-      <p:sp>
-        <p:nvSpPr>
-          <p:cNvPr id="13" name="Oval 12"/>
-          <p:cNvSpPr/>
+      <p:pic>
+        <p:nvPicPr>
+          <p:cNvPr id="13" name="Picture 12" descr="foundation-logo-white.png"/>
+          <p:cNvPicPr>
+            <a:picLocks noChangeAspect="1"/>
+          </p:cNvPicPr>
           <p:nvPr/>
-        </p:nvSpPr>
-        <p:spPr>
-          <a:xfrm>
-            <a:off x="571500" y="476250"/>
-            <a:ext cx="952500" cy="952500"/>
-          </a:xfrm>
-          <a:prstGeom prst="ellipse">
-            <a:avLst/>
-          </a:prstGeom>
-          <a:noFill/>
-          <a:ln w="19050">
-            <a:solidFill>
-              <a:srgbClr val="F4F1EA"/>
-            </a:solidFill>
-          </a:ln>
-          <a:effectLst/>
-        </p:spPr>
-        <p:style>
-          <a:lnRef idx="1">
-            <a:schemeClr val="accent1"/>
-          </a:lnRef>
-          <a:fillRef idx="3">
-            <a:schemeClr val="accent1"/>
-          </a:fillRef>
-          <a:effectRef idx="2">
-            <a:schemeClr val="accent1"/>
-          </a:effectRef>
-          <a:fontRef idx="minor">
-            <a:schemeClr val="lt1"/>
-          </a:fontRef>
-        </p:style>
-        <p:txBody>
-          <a:bodyPr rtlCol="0" anchor="ctr"/>
-          <a:lstStyle/>
-          <a:p>
-            <a:pPr algn="ctr"/>
-          </a:p>
-        </p:txBody>
-      </p:sp>
-      <p:sp>
-        <p:nvSpPr>
-          <p:cNvPr id="14" name="TextBox 13"/>
-          <p:cNvSpPr txBox="1"/>
-          <p:nvPr/>
-        </p:nvSpPr>
-        <p:spPr>
-          <a:xfrm>
-            <a:off x="571500" y="476250"/>
-            <a:ext cx="952500" cy="952500"/>
+        </p:nvPicPr>
+        <p:blipFill>
+          <a:blip r:embed="rId3"/>
+          <a:stretch>
+            <a:fillRect/>
+          </a:stretch>
+        </p:blipFill>
+        <p:spPr>
+          <a:xfrm>
+            <a:off x="476250" y="381000"/>
+            <a:ext cx="1165386" cy="1047750"/>
           </a:xfrm>
           <a:prstGeom prst="rect">
             <a:avLst/>
           </a:prstGeom>
-          <a:noFill/>
-        </p:spPr>
-        <p:txBody>
-          <a:bodyPr wrap="square" lIns="0" rIns="0" tIns="0" bIns="0" anchor="ctr">
-            <a:spAutoFit/>
-          </a:bodyPr>
-          <a:lstStyle/>
-          <a:p>
-            <a:pPr algn="ctr">
-              <a:lnSpc>
-                <a:spcPct val="120000"/>
-              </a:lnSpc>
-            </a:pPr>
-            <a:r>
-              <a:rPr sz="1800" b="1" i="0">
-                <a:solidFill>
-                  <a:srgbClr val="F4F1EA"/>
-                </a:solidFill>
-                <a:latin typeface="Montserrat"/>
-              </a:rPr>
-              <a:t>LOGO</a:t>
-            </a:r>
-          </a:p>
-        </p:txBody>
-      </p:sp>
-      <p:sp>
-        <p:nvSpPr>
-          <p:cNvPr id="15" name="Rectangle 14"/>
-          <p:cNvSpPr/>
-          <p:nvPr/>
-        </p:nvSpPr>
-        <p:spPr>
-          <a:xfrm>
-            <a:off x="1809750" y="523875"/>
-            <a:ext cx="19050" cy="857250"/>
-          </a:xfrm>
-          <a:prstGeom prst="rect">
-            <a:avLst/>
-          </a:prstGeom>
-          <a:solidFill>
-            <a:srgbClr val="F4F1EA"/>
-          </a:solidFill>
-          <a:ln>
-            <a:noFill/>
-          </a:ln>
-          <a:effectLst/>
-        </p:spPr>
-        <p:style>
-          <a:lnRef idx="1">
-            <a:schemeClr val="accent1"/>
-          </a:lnRef>
-          <a:fillRef idx="3">
-            <a:schemeClr val="accent1"/>
-          </a:fillRef>
-          <a:effectRef idx="2">
-            <a:schemeClr val="accent1"/>
-          </a:effectRef>
-          <a:fontRef idx="minor">
-            <a:schemeClr val="lt1"/>
-          </a:fontRef>
-        </p:style>
-        <p:txBody>
-          <a:bodyPr rtlCol="0" anchor="ctr"/>
-          <a:lstStyle/>
-          <a:p>
-            <a:pPr algn="ctr"/>
-          </a:p>
-        </p:txBody>
-      </p:sp>
-      <p:sp>
-        <p:nvSpPr>
-          <p:cNvPr id="16" name="Oval 15"/>
-          <p:cNvSpPr/>
-          <p:nvPr/>
-        </p:nvSpPr>
-        <p:spPr>
-          <a:xfrm>
-            <a:off x="2190750" y="476250"/>
-            <a:ext cx="952500" cy="952500"/>
-          </a:xfrm>
-          <a:prstGeom prst="ellipse">
-            <a:avLst/>
-          </a:prstGeom>
-          <a:noFill/>
-          <a:ln w="19050">
-            <a:solidFill>
-              <a:srgbClr val="F4F1EA"/>
-            </a:solidFill>
-          </a:ln>
-          <a:effectLst/>
-        </p:spPr>
-        <p:style>
-          <a:lnRef idx="1">
-            <a:schemeClr val="accent1"/>
-          </a:lnRef>
-          <a:fillRef idx="3">
-            <a:schemeClr val="accent1"/>
-          </a:fillRef>
-          <a:effectRef idx="2">
-            <a:schemeClr val="accent1"/>
-          </a:effectRef>
-          <a:fontRef idx="minor">
-            <a:schemeClr val="lt1"/>
-          </a:fontRef>
-        </p:style>
-        <p:txBody>
-          <a:bodyPr rtlCol="0" anchor="ctr"/>
-          <a:lstStyle/>
-          <a:p>
-            <a:pPr algn="ctr"/>
-          </a:p>
-        </p:txBody>
-      </p:sp>
-      <p:sp>
-        <p:nvSpPr>
-          <p:cNvPr id="17" name="TextBox 16"/>
-          <p:cNvSpPr txBox="1"/>
-          <p:nvPr/>
-        </p:nvSpPr>
-        <p:spPr>
-          <a:xfrm>
-            <a:off x="2190750" y="476250"/>
-            <a:ext cx="952500" cy="952500"/>
-          </a:xfrm>
-          <a:prstGeom prst="rect">
-            <a:avLst/>
-          </a:prstGeom>
-          <a:noFill/>
-        </p:spPr>
-        <p:txBody>
-          <a:bodyPr wrap="square" lIns="0" rIns="0" tIns="0" bIns="0" anchor="ctr">
-            <a:spAutoFit/>
-          </a:bodyPr>
-          <a:lstStyle/>
-          <a:p>
-            <a:pPr algn="ctr">
-              <a:lnSpc>
-                <a:spcPct val="120000"/>
-              </a:lnSpc>
-            </a:pPr>
-            <a:r>
-              <a:rPr sz="1800" b="1" i="0">
-                <a:solidFill>
-                  <a:srgbClr val="F4F1EA"/>
-                </a:solidFill>
-                <a:latin typeface="Montserrat"/>
-              </a:rPr>
-              <a:t>LOGO</a:t>
-            </a:r>
-          </a:p>
-        </p:txBody>
-      </p:sp>
-      <p:sp>
-        <p:nvSpPr>
-          <p:cNvPr id="18" name="Rectangle 17"/>
+        </p:spPr>
+      </p:pic>
+      <p:sp>
+        <p:nvSpPr>
+          <p:cNvPr id="14" name="Rectangle 13"/>
           <p:cNvSpPr/>
           <p:nvPr/>
         </p:nvSpPr>
@@ -10095,7 +9165,7 @@
       </p:sp>
       <p:sp>
         <p:nvSpPr>
-          <p:cNvPr id="19" name="Rectangle 18"/>
+          <p:cNvPr id="15" name="Rectangle 14"/>
           <p:cNvSpPr/>
           <p:nvPr/>
         </p:nvSpPr>
@@ -10141,7 +9211,7 @@
       </p:sp>
       <p:sp>
         <p:nvSpPr>
-          <p:cNvPr id="20" name="Rectangle 19"/>
+          <p:cNvPr id="16" name="Rectangle 15"/>
           <p:cNvSpPr/>
           <p:nvPr/>
         </p:nvSpPr>
@@ -10185,7 +9255,7 @@
       </p:sp>
       <p:sp>
         <p:nvSpPr>
-          <p:cNvPr id="21" name="Rectangle 20"/>
+          <p:cNvPr id="17" name="Rectangle 16"/>
           <p:cNvSpPr/>
           <p:nvPr/>
         </p:nvSpPr>
@@ -10229,7 +9299,7 @@
       </p:sp>
       <p:sp>
         <p:nvSpPr>
-          <p:cNvPr id="22" name="Rectangle 21"/>
+          <p:cNvPr id="18" name="Rectangle 17"/>
           <p:cNvSpPr/>
           <p:nvPr/>
         </p:nvSpPr>
@@ -10273,7 +9343,7 @@
       </p:sp>
       <p:sp>
         <p:nvSpPr>
-          <p:cNvPr id="23" name="TextBox 22"/>
+          <p:cNvPr id="19" name="TextBox 18"/>
           <p:cNvSpPr txBox="1"/>
           <p:nvPr/>
         </p:nvSpPr>
@@ -10312,7 +9382,7 @@
       </p:sp>
       <p:sp>
         <p:nvSpPr>
-          <p:cNvPr id="24" name="TextBox 23"/>
+          <p:cNvPr id="20" name="TextBox 19"/>
           <p:cNvSpPr txBox="1"/>
           <p:nvPr/>
         </p:nvSpPr>
@@ -10351,7 +9421,7 @@
       </p:sp>
       <p:sp>
         <p:nvSpPr>
-          <p:cNvPr id="25" name="TextBox 24"/>
+          <p:cNvPr id="21" name="TextBox 20"/>
           <p:cNvSpPr txBox="1"/>
           <p:nvPr/>
         </p:nvSpPr>

--- a/templates/posts/october/2026-10-05-mon-ig-teachers-day-banner-cards-alt.pptx
+++ b/templates/posts/october/2026-10-05-mon-ig-teachers-day-banner-cards-alt.pptx
@@ -3788,7 +3788,7 @@
     <p:bg>
       <p:bgPr>
         <a:solidFill>
-          <a:srgbClr val="22371F"/>
+          <a:srgbClr val="1E3F1D"/>
         </a:solidFill>
         <a:effectLst/>
       </p:bgPr>
@@ -3802,7 +3802,7 @@
       <p:grpSpPr/>
       <p:pic>
         <p:nvPicPr>
-          <p:cNvPr id="2" name="Picture 1" descr="1010799069374143544.jpg"/>
+          <p:cNvPr id="2" name="Picture 1" descr="8051510759006685926.jpg"/>
           <p:cNvPicPr>
             <a:picLocks noChangeAspect="1"/>
           </p:cNvPicPr>
@@ -4575,7 +4575,7 @@
             <a:avLst/>
           </a:prstGeom>
           <a:solidFill>
-            <a:srgbClr val="22371F"/>
+            <a:srgbClr val="1E3F1D"/>
           </a:solidFill>
           <a:ln>
             <a:noFill/>
@@ -4619,7 +4619,7 @@
             <a:avLst/>
           </a:prstGeom>
           <a:solidFill>
-            <a:srgbClr val="22371F">
+            <a:srgbClr val="1E3F1D">
               <a:alpha val="78000"/>
             </a:srgbClr>
           </a:solidFill>
@@ -4665,7 +4665,7 @@
             <a:avLst/>
           </a:prstGeom>
           <a:solidFill>
-            <a:srgbClr val="59A66C"/>
+            <a:srgbClr val="B1BCB1"/>
           </a:solidFill>
           <a:ln>
             <a:noFill/>
@@ -4709,7 +4709,7 @@
             <a:avLst/>
           </a:prstGeom>
           <a:solidFill>
-            <a:srgbClr val="59A66C"/>
+            <a:srgbClr val="B1BCB1"/>
           </a:solidFill>
           <a:ln>
             <a:noFill/>
@@ -4753,7 +4753,7 @@
             <a:avLst/>
           </a:prstGeom>
           <a:solidFill>
-            <a:srgbClr val="59A66C"/>
+            <a:srgbClr val="B1BCB1"/>
           </a:solidFill>
           <a:ln>
             <a:noFill/>
@@ -4890,7 +4890,7 @@
             <a:r>
               <a:rPr sz="3000" b="0" i="0">
                 <a:solidFill>
-                  <a:srgbClr val="F4F1EA"/>
+                  <a:srgbClr val="F3F1EA"/>
                 </a:solidFill>
                 <a:latin typeface="Source Sans 3"/>
               </a:rPr>
@@ -4913,7 +4913,7 @@
     <p:bg>
       <p:bgPr>
         <a:solidFill>
-          <a:srgbClr val="22371F"/>
+          <a:srgbClr val="1E3F1D"/>
         </a:solidFill>
         <a:effectLst/>
       </p:bgPr>
@@ -4927,7 +4927,7 @@
       <p:grpSpPr/>
       <p:pic>
         <p:nvPicPr>
-          <p:cNvPr id="2" name="Picture 1" descr="378979091444184200.jpg"/>
+          <p:cNvPr id="2" name="Picture 1" descr="158657995928455972.jpg"/>
           <p:cNvPicPr>
             <a:picLocks noChangeAspect="1"/>
           </p:cNvPicPr>
@@ -5700,7 +5700,7 @@
             <a:avLst/>
           </a:prstGeom>
           <a:solidFill>
-            <a:srgbClr val="22371F"/>
+            <a:srgbClr val="1E3F1D"/>
           </a:solidFill>
           <a:ln>
             <a:noFill/>
@@ -5744,7 +5744,7 @@
             <a:avLst/>
           </a:prstGeom>
           <a:solidFill>
-            <a:srgbClr val="22371F">
+            <a:srgbClr val="1E3F1D">
               <a:alpha val="78000"/>
             </a:srgbClr>
           </a:solidFill>
@@ -5790,7 +5790,7 @@
             <a:avLst/>
           </a:prstGeom>
           <a:solidFill>
-            <a:srgbClr val="59A66C"/>
+            <a:srgbClr val="B1BCB1"/>
           </a:solidFill>
           <a:ln>
             <a:noFill/>
@@ -5834,7 +5834,7 @@
             <a:avLst/>
           </a:prstGeom>
           <a:solidFill>
-            <a:srgbClr val="59A66C"/>
+            <a:srgbClr val="B1BCB1"/>
           </a:solidFill>
           <a:ln>
             <a:noFill/>
@@ -5878,7 +5878,7 @@
             <a:avLst/>
           </a:prstGeom>
           <a:solidFill>
-            <a:srgbClr val="59A66C"/>
+            <a:srgbClr val="B1BCB1"/>
           </a:solidFill>
           <a:ln>
             <a:noFill/>
@@ -6015,7 +6015,7 @@
             <a:r>
               <a:rPr sz="3000" b="0" i="0">
                 <a:solidFill>
-                  <a:srgbClr val="F4F1EA"/>
+                  <a:srgbClr val="F3F1EA"/>
                 </a:solidFill>
                 <a:latin typeface="Source Sans 3"/>
               </a:rPr>
@@ -6038,7 +6038,7 @@
     <p:bg>
       <p:bgPr>
         <a:solidFill>
-          <a:srgbClr val="22371F"/>
+          <a:srgbClr val="1E3F1D"/>
         </a:solidFill>
         <a:effectLst/>
       </p:bgPr>
@@ -6052,7 +6052,7 @@
       <p:grpSpPr/>
       <p:pic>
         <p:nvPicPr>
-          <p:cNvPr id="2" name="Picture 1" descr="5325947196430632003.jpg"/>
+          <p:cNvPr id="2" name="Picture 1" descr="7761316652033802895.jpg"/>
           <p:cNvPicPr>
             <a:picLocks noChangeAspect="1"/>
           </p:cNvPicPr>
@@ -6825,7 +6825,7 @@
             <a:avLst/>
           </a:prstGeom>
           <a:solidFill>
-            <a:srgbClr val="22371F"/>
+            <a:srgbClr val="1E3F1D"/>
           </a:solidFill>
           <a:ln>
             <a:noFill/>
@@ -6869,7 +6869,7 @@
             <a:avLst/>
           </a:prstGeom>
           <a:solidFill>
-            <a:srgbClr val="22371F">
+            <a:srgbClr val="1E3F1D">
               <a:alpha val="78000"/>
             </a:srgbClr>
           </a:solidFill>
@@ -6915,7 +6915,7 @@
             <a:avLst/>
           </a:prstGeom>
           <a:solidFill>
-            <a:srgbClr val="59A66C"/>
+            <a:srgbClr val="B1BCB1"/>
           </a:solidFill>
           <a:ln>
             <a:noFill/>
@@ -6959,7 +6959,7 @@
             <a:avLst/>
           </a:prstGeom>
           <a:solidFill>
-            <a:srgbClr val="59A66C"/>
+            <a:srgbClr val="B1BCB1"/>
           </a:solidFill>
           <a:ln>
             <a:noFill/>
@@ -7003,7 +7003,7 @@
             <a:avLst/>
           </a:prstGeom>
           <a:solidFill>
-            <a:srgbClr val="59A66C"/>
+            <a:srgbClr val="B1BCB1"/>
           </a:solidFill>
           <a:ln>
             <a:noFill/>
@@ -7140,7 +7140,7 @@
             <a:r>
               <a:rPr sz="3000" b="0" i="0">
                 <a:solidFill>
-                  <a:srgbClr val="F4F1EA"/>
+                  <a:srgbClr val="F3F1EA"/>
                 </a:solidFill>
                 <a:latin typeface="Source Sans 3"/>
               </a:rPr>
@@ -7163,7 +7163,7 @@
     <p:bg>
       <p:bgPr>
         <a:solidFill>
-          <a:srgbClr val="22371F"/>
+          <a:srgbClr val="1E3F1D"/>
         </a:solidFill>
         <a:effectLst/>
       </p:bgPr>
@@ -7177,7 +7177,7 @@
       <p:grpSpPr/>
       <p:pic>
         <p:nvPicPr>
-          <p:cNvPr id="2" name="Picture 1" descr="754003833889730245.jpg"/>
+          <p:cNvPr id="2" name="Picture 1" descr="8174217170755656627.jpg"/>
           <p:cNvPicPr>
             <a:picLocks noChangeAspect="1"/>
           </p:cNvPicPr>
@@ -7950,7 +7950,7 @@
             <a:avLst/>
           </a:prstGeom>
           <a:solidFill>
-            <a:srgbClr val="22371F"/>
+            <a:srgbClr val="1E3F1D"/>
           </a:solidFill>
           <a:ln>
             <a:noFill/>
@@ -7994,7 +7994,7 @@
             <a:avLst/>
           </a:prstGeom>
           <a:solidFill>
-            <a:srgbClr val="22371F">
+            <a:srgbClr val="1E3F1D">
               <a:alpha val="78000"/>
             </a:srgbClr>
           </a:solidFill>
@@ -8040,7 +8040,7 @@
             <a:avLst/>
           </a:prstGeom>
           <a:solidFill>
-            <a:srgbClr val="59A66C"/>
+            <a:srgbClr val="B1BCB1"/>
           </a:solidFill>
           <a:ln>
             <a:noFill/>
@@ -8084,7 +8084,7 @@
             <a:avLst/>
           </a:prstGeom>
           <a:solidFill>
-            <a:srgbClr val="59A66C"/>
+            <a:srgbClr val="B1BCB1"/>
           </a:solidFill>
           <a:ln>
             <a:noFill/>
@@ -8128,7 +8128,7 @@
             <a:avLst/>
           </a:prstGeom>
           <a:solidFill>
-            <a:srgbClr val="59A66C"/>
+            <a:srgbClr val="B1BCB1"/>
           </a:solidFill>
           <a:ln>
             <a:noFill/>
@@ -8265,7 +8265,7 @@
             <a:r>
               <a:rPr sz="3000" b="0" i="0">
                 <a:solidFill>
-                  <a:srgbClr val="F4F1EA"/>
+                  <a:srgbClr val="F3F1EA"/>
                 </a:solidFill>
                 <a:latin typeface="Source Sans 3"/>
               </a:rPr>
@@ -8288,7 +8288,7 @@
     <p:bg>
       <p:bgPr>
         <a:solidFill>
-          <a:srgbClr val="22371F"/>
+          <a:srgbClr val="1E3F1D"/>
         </a:solidFill>
         <a:effectLst/>
       </p:bgPr>
@@ -9134,7 +9134,7 @@
             <a:avLst/>
           </a:prstGeom>
           <a:solidFill>
-            <a:srgbClr val="22371F"/>
+            <a:srgbClr val="1E3F1D"/>
           </a:solidFill>
           <a:ln>
             <a:noFill/>
@@ -9178,7 +9178,7 @@
             <a:avLst/>
           </a:prstGeom>
           <a:solidFill>
-            <a:srgbClr val="22371F">
+            <a:srgbClr val="1E3F1D">
               <a:alpha val="78000"/>
             </a:srgbClr>
           </a:solidFill>
@@ -9224,7 +9224,7 @@
             <a:avLst/>
           </a:prstGeom>
           <a:solidFill>
-            <a:srgbClr val="59A66C"/>
+            <a:srgbClr val="B1BCB1"/>
           </a:solidFill>
           <a:ln>
             <a:noFill/>
@@ -9268,7 +9268,7 @@
             <a:avLst/>
           </a:prstGeom>
           <a:solidFill>
-            <a:srgbClr val="59A66C"/>
+            <a:srgbClr val="B1BCB1"/>
           </a:solidFill>
           <a:ln>
             <a:noFill/>
@@ -9312,7 +9312,7 @@
             <a:avLst/>
           </a:prstGeom>
           <a:solidFill>
-            <a:srgbClr val="59A66C"/>
+            <a:srgbClr val="B1BCB1"/>
           </a:solidFill>
           <a:ln>
             <a:noFill/>
@@ -9449,7 +9449,7 @@
             <a:r>
               <a:rPr sz="3000" b="0" i="0">
                 <a:solidFill>
-                  <a:srgbClr val="F4F1EA"/>
+                  <a:srgbClr val="F3F1EA"/>
                 </a:solidFill>
                 <a:latin typeface="Source Sans 3"/>
               </a:rPr>
